--- a/lecons/F2T/24_S18_L5_P5_Tertiary_Sector.pptx
+++ b/lecons/F2T/24_S18_L5_P5_Tertiary_Sector.pptx
@@ -53,9 +53,11 @@
     <p:sldId id="301" r:id="rId47"/>
     <p:sldId id="302" r:id="rId48"/>
     <p:sldId id="303" r:id="rId49"/>
+    <p:sldId id="304" r:id="rId50"/>
+    <p:sldId id="305" r:id="rId51"/>
   </p:sldIdLst>
   <p:notesMasterIdLst>
-    <p:notesMasterId r:id="rId50"/>
+    <p:notesMasterId r:id="rId52"/>
   </p:notesMasterIdLst>
   <p:sldSz cx="12192000" cy="6858000"/>
   <p:notesSz cx="6858000" cy="12192000"/>
@@ -725,7 +727,7 @@
           <a:p>
             <a:r>
               <a:rPr lang="en-US" dirty="0"/>
-              <a:t>Good. The cloth cannot reach the traders because the road is damaged.</a:t>
+              <a:t>Good. The goods cannot reach buyers because transport is blocked.</a:t>
             </a:r>
             <a:endParaRPr lang="en-US" dirty="0"/>
           </a:p>
@@ -813,7 +815,7 @@
           <a:p>
             <a:r>
               <a:rPr lang="en-US" dirty="0"/>
-              <a:t>Question 2: Which service is missing? Think for a moment, then raise your hand to answer.</a:t>
+              <a:t>Question 2: Why can the lorries not pass? Think for a moment, then raise your hand to answer.</a:t>
             </a:r>
             <a:endParaRPr lang="en-US" dirty="0"/>
           </a:p>
@@ -901,7 +903,7 @@
           <a:p>
             <a:r>
               <a:rPr lang="en-US" dirty="0"/>
-              <a:t>Good. Transport.</a:t>
+              <a:t>Good. The road is damaged.</a:t>
             </a:r>
             <a:endParaRPr lang="en-US" dirty="0"/>
           </a:p>
@@ -989,7 +991,7 @@
           <a:p>
             <a:r>
               <a:rPr lang="en-US" dirty="0"/>
-              <a:t>Question 3: What can the government do? Think for a moment, then raise your hand to answer.</a:t>
+              <a:t>Question 3: Who suffers in the South? Think for a moment, then raise your hand to answer.</a:t>
             </a:r>
             <a:endParaRPr lang="en-US" dirty="0"/>
           </a:p>
@@ -1077,7 +1079,7 @@
           <a:p>
             <a:r>
               <a:rPr lang="en-US" dirty="0"/>
-              <a:t>Good. Repair the road.</a:t>
+              <a:t>Good. The traders, who have nothing to sell.</a:t>
             </a:r>
             <a:endParaRPr lang="en-US" dirty="0"/>
           </a:p>
@@ -1341,7 +1343,7 @@
           <a:p>
             <a:r>
               <a:rPr lang="en-US" dirty="0"/>
-              <a:t>Activity 1. Look carefully at this picture: a market in Cameroon. Observe every detail before I ask the question.</a:t>
+              <a:t>Activity 1. Look carefully at this picture: a market. Observe every detail before I ask the question.</a:t>
             </a:r>
             <a:endParaRPr lang="en-US" dirty="0"/>
           </a:p>
@@ -1429,7 +1431,7 @@
           <a:p>
             <a:r>
               <a:rPr lang="en-US" dirty="0"/>
-              <a:t>Here is the question for Activity 1: These people buy and sell. What do we call this service? Take one minute to think and write your answer in your rough notebook.</a:t>
+              <a:t>Here is the question for Activity 1: People buy and sell here. What is this service called? Take one minute to think and write your answer in your rough notebook.</a:t>
             </a:r>
             <a:endParaRPr lang="en-US" dirty="0"/>
           </a:p>
@@ -1693,7 +1695,7 @@
           <a:p>
             <a:r>
               <a:rPr lang="en-US" dirty="0"/>
-              <a:t>Activity 2. Look carefully at this picture: a train in Cameroon. Observe every detail before I ask the question.</a:t>
+              <a:t>Activity 2. Look carefully at this picture: a train. Observe every detail before I ask the question.</a:t>
             </a:r>
             <a:endParaRPr lang="en-US" dirty="0"/>
           </a:p>
@@ -1781,7 +1783,7 @@
           <a:p>
             <a:r>
               <a:rPr lang="en-US" dirty="0"/>
-              <a:t>Here is the question for Activity 2: Name three means of transport used in Cameroon. Take one minute to think and write your answer in your rough notebook.</a:t>
+              <a:t>Here is the question for Activity 2: Name two means of transport used in Cameroon. Take one minute to think and write your answer in your rough notebook.</a:t>
             </a:r>
             <a:endParaRPr lang="en-US" dirty="0"/>
           </a:p>
@@ -1869,7 +1871,7 @@
           <a:p>
             <a:r>
               <a:rPr lang="en-US" dirty="0"/>
-              <a:t>Let us check the answer together. Road (lorries, buses), train and plane (also boats).</a:t>
+              <a:t>Let us check the answer together. Road and train (also plane and boat).</a:t>
             </a:r>
             <a:endParaRPr lang="en-US" dirty="0"/>
           </a:p>
@@ -1957,7 +1959,7 @@
           <a:p>
             <a:r>
               <a:rPr lang="en-US" dirty="0"/>
-              <a:t>Activity 3. Look carefully at this picture: a mobile money shop. Observe every detail before I ask the question.</a:t>
+              <a:t>Activity 3. Look carefully at this picture: mobile money. Observe every detail before I ask the question.</a:t>
             </a:r>
             <a:endParaRPr lang="en-US" dirty="0"/>
           </a:p>
@@ -2133,7 +2135,7 @@
           <a:p>
             <a:r>
               <a:rPr lang="en-US" dirty="0"/>
-              <a:t>Let us check the answer together. People can send and keep money with a phone.</a:t>
+              <a:t>Let us check the answer together. They can send and keep money with a phone.</a:t>
             </a:r>
             <a:endParaRPr lang="en-US" dirty="0"/>
           </a:p>
@@ -2221,7 +2223,7 @@
           <a:p>
             <a:r>
               <a:rPr lang="en-US" dirty="0"/>
-              <a:t>Activity 4. Look carefully at this picture: a teacher in a classroom. Observe every detail before I ask the question.</a:t>
+              <a:t>Activity 4. Look carefully at this picture: a classroom. Observe every detail before I ask the question.</a:t>
             </a:r>
             <a:endParaRPr lang="en-US" dirty="0"/>
           </a:p>
@@ -2309,7 +2311,7 @@
           <a:p>
             <a:r>
               <a:rPr lang="en-US" dirty="0"/>
-              <a:t>Here is the question for Activity 4: Name two services given by the state. Take one minute to think and write your answer in your rough notebook.</a:t>
+              <a:t>Here is the question for Activity 4: Name one service given by the state. Take one minute to think and write your answer in your rough notebook.</a:t>
             </a:r>
             <a:endParaRPr lang="en-US" dirty="0"/>
           </a:p>
@@ -2397,7 +2399,7 @@
           <a:p>
             <a:r>
               <a:rPr lang="en-US" dirty="0"/>
-              <a:t>Let us check the answer together. Schools (education) and hospitals (health).</a:t>
+              <a:t>Let us check the answer together. Education (also health).</a:t>
             </a:r>
             <a:endParaRPr lang="en-US" dirty="0"/>
           </a:p>
@@ -2573,7 +2575,7 @@
           <a:p>
             <a:r>
               <a:rPr lang="en-US" dirty="0"/>
-              <a:t>Activity 5. Look carefully at this picture: a leopard in a national park. Observe every detail before I ask the question.</a:t>
+              <a:t>Activity 5. Look carefully at this picture: tourists. Observe every detail before I ask the question.</a:t>
             </a:r>
             <a:endParaRPr lang="en-US" dirty="0"/>
           </a:p>
@@ -2749,7 +2751,7 @@
           <a:p>
             <a:r>
               <a:rPr lang="en-US" dirty="0"/>
-              <a:t>Let us check the answer together. To see wild animals in the Waza and Bénoué parks.</a:t>
+              <a:t>Let us check the answer together. To see animals in the Waza and Bénoué parks.</a:t>
             </a:r>
             <a:endParaRPr lang="en-US" dirty="0"/>
           </a:p>
@@ -3013,7 +3015,7 @@
           <a:p>
             <a:r>
               <a:rPr lang="en-US" dirty="0"/>
-              <a:t>Let us copy Examples of the Tertiary Sector. The tertiary sector in Cameroon includes the following services. On this slide we have Trade and Transport. Write each point on a new line, with the key term first, and explain it in your own words when we revise. When you finish, we go to the next slide.</a:t>
+              <a:t>Let us copy Examples of Tertiary Activities. The tertiary sector includes the following activities. Copy the point on Trade on the left, then draw the diagram on the right: a market. Give it a title and label it clearly.</a:t>
             </a:r>
             <a:endParaRPr lang="en-US" dirty="0"/>
           </a:p>
@@ -3101,7 +3103,7 @@
           <a:p>
             <a:r>
               <a:rPr lang="en-US" dirty="0"/>
-              <a:t>We continue with Examples of the Tertiary Sector. On this slide we have Banking, Social services and Tourism. Write each point on a new line, with the key term first, and explain it in your own words when we revise.</a:t>
+              <a:t>Copy the point on Transport on the left, then draw the diagram on the right: a train. Give it a title and label it clearly.</a:t>
             </a:r>
             <a:endParaRPr lang="en-US" dirty="0"/>
           </a:p>
@@ -3189,7 +3191,7 @@
           <a:p>
             <a:r>
               <a:rPr lang="en-US" dirty="0"/>
-              <a:t>Now let us check what you have understood. Question 1: What is the tertiary sector? Answer in your exercise book.</a:t>
+              <a:t>We continue with Examples of Tertiary Activities. On this slide we have Banking and mobile money, Education and health and Communication. Write each point on a new line, with the key term first, and explain it in your own words when we revise. When you finish, we go to the next slide.</a:t>
             </a:r>
             <a:endParaRPr lang="en-US" dirty="0"/>
           </a:p>
@@ -3277,7 +3279,7 @@
           <a:p>
             <a:r>
               <a:rPr lang="en-US" dirty="0"/>
-              <a:t>The expected answer is: the sector that gives services. If you got it right, well done.</a:t>
+              <a:t>We continue with Examples of Tertiary Activities. On this slide we have Tourism. Write each point on a new line, with the key term first, and explain it in your own words when we revise.</a:t>
             </a:r>
             <a:endParaRPr lang="en-US" dirty="0"/>
           </a:p>
@@ -3365,7 +3367,7 @@
           <a:p>
             <a:r>
               <a:rPr lang="en-US" dirty="0"/>
-              <a:t>Now let us check what you have understood. Question 2: Give three examples of services. Answer in your exercise book.</a:t>
+              <a:t>Now let us check what you have understood. Question 1: What is the tertiary sector? Answer in your exercise book.</a:t>
             </a:r>
             <a:endParaRPr lang="en-US" dirty="0"/>
           </a:p>
@@ -3541,7 +3543,7 @@
           <a:p>
             <a:r>
               <a:rPr lang="en-US" dirty="0"/>
-              <a:t>The expected answer is: trade, transport and education (also banking, health, tourism). If you got it right, well done.</a:t>
+              <a:t>The expected answer is: the sector that gives services. If you got it right, well done.</a:t>
             </a:r>
             <a:endParaRPr lang="en-US" dirty="0"/>
           </a:p>
@@ -3629,7 +3631,7 @@
           <a:p>
             <a:r>
               <a:rPr lang="en-US" dirty="0"/>
-              <a:t>For those who need more practice, fill in the blanks in your exercise book. The answers are: number 1, tertiary; number 2, trade; number 3, tourism.</a:t>
+              <a:t>Now let us check what you have understood. Question 2: Give three examples of services. Answer in your exercise book.</a:t>
             </a:r>
             <a:endParaRPr lang="en-US" dirty="0"/>
           </a:p>
@@ -3717,7 +3719,7 @@
           <a:p>
             <a:r>
               <a:rPr lang="en-US" dirty="0"/>
-              <a:t>For your homework: Find out what a research centre does. Ask an adult or read about IRAD (Institute of Agricultural Research for Development). We shall correct it at the beginning of our next lesson.</a:t>
+              <a:t>The expected answer is: trade, transport and education (also banking, health, tourism). If you got it right, well done.</a:t>
             </a:r>
             <a:endParaRPr lang="en-US" dirty="0"/>
           </a:p>
@@ -3805,7 +3807,7 @@
           <a:p>
             <a:r>
               <a:rPr lang="en-US" dirty="0"/>
-              <a:t>Our next lesson will be on Lesson 5 (Part 6): The Sectors of the Economy: The Quaternary Sector (Definition and Examples). Thank you for your attention, and see you next time.</a:t>
+              <a:t>For those who need more practice, fill in the blanks in your exercise book. The answers are: number 1, tertiary; number 2, trade; number 3, tourism.</a:t>
             </a:r>
             <a:endParaRPr lang="en-US" dirty="0"/>
           </a:p>
@@ -3893,7 +3895,7 @@
           <a:p>
             <a:r>
               <a:rPr lang="en-US" dirty="0"/>
-              <a:t>Let us play the bilingual game. I say a word in English, and you give me the French word. Then we do the reverse.</a:t>
+              <a:t>For your homework: Find out what a research centre does. Ask an adult or read about IRAD (Institute of Agricultural Research for Development). We shall correct it at the beginning of our next lesson.</a:t>
             </a:r>
             <a:endParaRPr lang="en-US" dirty="0"/>
           </a:p>
@@ -3981,7 +3983,7 @@
           <a:p>
             <a:r>
               <a:rPr lang="en-US" dirty="0"/>
-              <a:t>I record this information in the official logbook of the class after the lesson.</a:t>
+              <a:t>Our next lesson will be on Lesson 5 (Part 6): The Sectors of the Economy: The Quaternary Sector (Definition and Examples). Thank you for your attention, and see you next time.</a:t>
             </a:r>
             <a:endParaRPr lang="en-US" dirty="0"/>
           </a:p>
@@ -4069,7 +4071,7 @@
           <a:p>
             <a:r>
               <a:rPr lang="en-US" dirty="0"/>
-              <a:t>I complete the second page of the logbook: the matter taught, the evaluation, the homework and the attendance.</a:t>
+              <a:t>Let us play the bilingual game. I say a word in English, and you give me the French word. Then we do the reverse.</a:t>
             </a:r>
             <a:endParaRPr lang="en-US" dirty="0"/>
           </a:p>
@@ -4157,7 +4159,7 @@
           <a:p>
             <a:r>
               <a:rPr lang="en-US" dirty="0"/>
-              <a:t>This slide is for me, the teacher: it gives the timing of the lesson and what to do if the projector is not available.</a:t>
+              <a:t>I record this information in the official logbook of the class after the lesson.</a:t>
             </a:r>
             <a:endParaRPr lang="en-US" dirty="0"/>
           </a:p>
@@ -4245,7 +4247,7 @@
           <a:p>
             <a:r>
               <a:rPr lang="en-US" dirty="0"/>
-              <a:t>These are the references and picture credits used to prepare this lesson.</a:t>
+              <a:t>I complete the second page of the logbook: the matter taught, the evaluation, the homework and the attendance.</a:t>
             </a:r>
             <a:endParaRPr lang="en-US" dirty="0"/>
           </a:p>
@@ -4269,6 +4271,94 @@
             <a:fld id="{F7021451-1387-4CA6-816F-3879F97B5CBC}" type="slidenum">
               <a:rPr lang="en-US"/>
               <a:t>48</a:t>
+            </a:fld>
+            <a:endParaRPr lang="en-US"/>
+          </a:p>
+        </p:txBody>
+      </p:sp>
+    </p:spTree>
+    <p:extLst>
+      <p:ext uri="{BB962C8B-B14F-4D97-AF65-F5344CB8AC3E}">
+        <p14:creationId xmlns:p14="http://schemas.microsoft.com/office/powerpoint/2010/main" val="1024086991"/>
+      </p:ext>
+    </p:extLst>
+  </p:cSld>
+  <p:clrMapOvr>
+    <a:masterClrMapping/>
+  </p:clrMapOvr>
+</p:notes>
+</file>
+
+<file path=ppt/notesSlides/notesSlide49.xml><?xml version="1.0" encoding="utf-8"?>
+<p:notes xmlns:a="http://schemas.openxmlformats.org/drawingml/2006/main" xmlns:r="http://schemas.openxmlformats.org/officeDocument/2006/relationships" xmlns:p="http://schemas.openxmlformats.org/presentationml/2006/main">
+  <p:cSld>
+    <p:spTree>
+      <p:nvGrpSpPr>
+        <p:cNvPr id="1" name=""/>
+        <p:cNvGrpSpPr/>
+        <p:nvPr/>
+      </p:nvGrpSpPr>
+      <p:grpSpPr>
+        <a:xfrm>
+          <a:off x="0" y="0"/>
+          <a:ext cx="0" cy="0"/>
+          <a:chOff x="0" y="0"/>
+          <a:chExt cx="0" cy="0"/>
+        </a:xfrm>
+      </p:grpSpPr>
+      <p:sp>
+        <p:nvSpPr>
+          <p:cNvPr id="2" name="Slide Image Placeholder 1"/>
+          <p:cNvSpPr>
+            <a:spLocks noGrp="1" noRot="1" noChangeAspect="1"/>
+          </p:cNvSpPr>
+          <p:nvPr>
+            <p:ph type="sldImg"/>
+          </p:nvPr>
+        </p:nvSpPr>
+        <p:spPr/>
+      </p:sp>
+      <p:sp>
+        <p:nvSpPr>
+          <p:cNvPr id="3" name="Notes Placeholder 2"/>
+          <p:cNvSpPr>
+            <a:spLocks noGrp="1"/>
+          </p:cNvSpPr>
+          <p:nvPr>
+            <p:ph type="body" idx="1"/>
+          </p:nvPr>
+        </p:nvSpPr>
+        <p:spPr/>
+        <p:txBody>
+          <a:bodyPr/>
+          <a:lstStyle/>
+          <a:p>
+            <a:r>
+              <a:rPr lang="en-US" dirty="0"/>
+              <a:t>This slide is for me, the teacher: it gives the timing of the lesson and what to do if the projector is not available.</a:t>
+            </a:r>
+            <a:endParaRPr lang="en-US" dirty="0"/>
+          </a:p>
+        </p:txBody>
+      </p:sp>
+      <p:sp>
+        <p:nvSpPr>
+          <p:cNvPr id="4" name="Slide Number Placeholder 3"/>
+          <p:cNvSpPr>
+            <a:spLocks noGrp="1"/>
+          </p:cNvSpPr>
+          <p:nvPr>
+            <p:ph type="sldNum" sz="quarter" idx="10"/>
+          </p:nvPr>
+        </p:nvSpPr>
+        <p:spPr/>
+        <p:txBody>
+          <a:bodyPr/>
+          <a:lstStyle/>
+          <a:p>
+            <a:fld id="{F7021451-1387-4CA6-816F-3879F97B5CBC}" type="slidenum">
+              <a:rPr lang="en-US"/>
+              <a:t>49</a:t>
             </a:fld>
             <a:endParaRPr lang="en-US"/>
           </a:p>
@@ -4375,6 +4465,94 @@
 </p:notes>
 </file>
 
+<file path=ppt/notesSlides/notesSlide50.xml><?xml version="1.0" encoding="utf-8"?>
+<p:notes xmlns:a="http://schemas.openxmlformats.org/drawingml/2006/main" xmlns:r="http://schemas.openxmlformats.org/officeDocument/2006/relationships" xmlns:p="http://schemas.openxmlformats.org/presentationml/2006/main">
+  <p:cSld>
+    <p:spTree>
+      <p:nvGrpSpPr>
+        <p:cNvPr id="1" name=""/>
+        <p:cNvGrpSpPr/>
+        <p:nvPr/>
+      </p:nvGrpSpPr>
+      <p:grpSpPr>
+        <a:xfrm>
+          <a:off x="0" y="0"/>
+          <a:ext cx="0" cy="0"/>
+          <a:chOff x="0" y="0"/>
+          <a:chExt cx="0" cy="0"/>
+        </a:xfrm>
+      </p:grpSpPr>
+      <p:sp>
+        <p:nvSpPr>
+          <p:cNvPr id="2" name="Slide Image Placeholder 1"/>
+          <p:cNvSpPr>
+            <a:spLocks noGrp="1" noRot="1" noChangeAspect="1"/>
+          </p:cNvSpPr>
+          <p:nvPr>
+            <p:ph type="sldImg"/>
+          </p:nvPr>
+        </p:nvSpPr>
+        <p:spPr/>
+      </p:sp>
+      <p:sp>
+        <p:nvSpPr>
+          <p:cNvPr id="3" name="Notes Placeholder 2"/>
+          <p:cNvSpPr>
+            <a:spLocks noGrp="1"/>
+          </p:cNvSpPr>
+          <p:nvPr>
+            <p:ph type="body" idx="1"/>
+          </p:nvPr>
+        </p:nvSpPr>
+        <p:spPr/>
+        <p:txBody>
+          <a:bodyPr/>
+          <a:lstStyle/>
+          <a:p>
+            <a:r>
+              <a:rPr lang="en-US" dirty="0"/>
+              <a:t>These are the references and picture credits used to prepare this lesson.</a:t>
+            </a:r>
+            <a:endParaRPr lang="en-US" dirty="0"/>
+          </a:p>
+        </p:txBody>
+      </p:sp>
+      <p:sp>
+        <p:nvSpPr>
+          <p:cNvPr id="4" name="Slide Number Placeholder 3"/>
+          <p:cNvSpPr>
+            <a:spLocks noGrp="1"/>
+          </p:cNvSpPr>
+          <p:nvPr>
+            <p:ph type="sldNum" sz="quarter" idx="10"/>
+          </p:nvPr>
+        </p:nvSpPr>
+        <p:spPr/>
+        <p:txBody>
+          <a:bodyPr/>
+          <a:lstStyle/>
+          <a:p>
+            <a:fld id="{F7021451-1387-4CA6-816F-3879F97B5CBC}" type="slidenum">
+              <a:rPr lang="en-US"/>
+              <a:t>50</a:t>
+            </a:fld>
+            <a:endParaRPr lang="en-US"/>
+          </a:p>
+        </p:txBody>
+      </p:sp>
+    </p:spTree>
+    <p:extLst>
+      <p:ext uri="{BB962C8B-B14F-4D97-AF65-F5344CB8AC3E}">
+        <p14:creationId xmlns:p14="http://schemas.microsoft.com/office/powerpoint/2010/main" val="1024086991"/>
+      </p:ext>
+    </p:extLst>
+  </p:cSld>
+  <p:clrMapOvr>
+    <a:masterClrMapping/>
+  </p:clrMapOvr>
+</p:notes>
+</file>
+
 <file path=ppt/notesSlides/notesSlide6.xml><?xml version="1.0" encoding="utf-8"?>
 <p:notes xmlns:a="http://schemas.openxmlformats.org/drawingml/2006/main" xmlns:r="http://schemas.openxmlformats.org/officeDocument/2006/relationships" xmlns:p="http://schemas.openxmlformats.org/presentationml/2006/main">
   <p:cSld>
@@ -4685,7 +4863,7 @@
           <a:p>
             <a:r>
               <a:rPr lang="en-US" dirty="0"/>
-              <a:t>Listen carefully to this situation from real life. The CICAM factory in Garoua has made a lot of cloth. But the road to Ngaoundéré is damaged, and lorries cannot pass. The cloth stays in the factory, and traders in the South have nothing to sell. Think about it, because I am going to ask you some questions.</a:t>
+              <a:t>Listen carefully to this situation from real life. The CICAM factory in Garoua has made a lot of cloth, but the road to Ngaoundéré is damaged and lorries cannot pass. The cloth stays in the factory, and traders in the South have nothing to sell. The manager asks: "Which activities help goods reach the people?" Think about it, because I am going to ask you some questions.</a:t>
             </a:r>
             <a:endParaRPr lang="en-US" dirty="0"/>
           </a:p>
@@ -6368,7 +6546,7 @@
                 <a:ea typeface="Times New Roman" pitchFamily="34" charset="-122"/>
                 <a:cs typeface="Times New Roman" pitchFamily="34" charset="-120"/>
               </a:rPr>
-              <a:t>The cloth cannot reach the traders because the road is damaged.</a:t>
+              <a:t>The goods cannot reach buyers because transport is blocked.</a:t>
             </a:r>
             <a:endParaRPr lang="en-US" sz="4000" dirty="0"/>
           </a:p>
@@ -6587,7 +6765,7 @@
                 <a:ea typeface="Times New Roman" pitchFamily="34" charset="-122"/>
                 <a:cs typeface="Times New Roman" pitchFamily="34" charset="-120"/>
               </a:rPr>
-              <a:t>Which service is missing?</a:t>
+              <a:t>Why can the lorries not pass?</a:t>
             </a:r>
             <a:endParaRPr lang="en-US" sz="4000" dirty="0"/>
           </a:p>
@@ -6806,7 +6984,7 @@
                 <a:ea typeface="Times New Roman" pitchFamily="34" charset="-122"/>
                 <a:cs typeface="Times New Roman" pitchFamily="34" charset="-120"/>
               </a:rPr>
-              <a:t>Transport.</a:t>
+              <a:t>The road is damaged.</a:t>
             </a:r>
             <a:endParaRPr lang="en-US" sz="4000" dirty="0"/>
           </a:p>
@@ -7025,7 +7203,7 @@
                 <a:ea typeface="Times New Roman" pitchFamily="34" charset="-122"/>
                 <a:cs typeface="Times New Roman" pitchFamily="34" charset="-120"/>
               </a:rPr>
-              <a:t>What can the government do?</a:t>
+              <a:t>Who suffers in the South?</a:t>
             </a:r>
             <a:endParaRPr lang="en-US" sz="4000" dirty="0"/>
           </a:p>
@@ -7244,7 +7422,7 @@
                 <a:ea typeface="Times New Roman" pitchFamily="34" charset="-122"/>
                 <a:cs typeface="Times New Roman" pitchFamily="34" charset="-120"/>
               </a:rPr>
-              <a:t>Repair the road.</a:t>
+              <a:t>The traders, who have nothing to sell.</a:t>
             </a:r>
             <a:endParaRPr lang="en-US" sz="4000" dirty="0"/>
           </a:p>
@@ -7794,7 +7972,7 @@
                 <a:ea typeface="Calibri" pitchFamily="34" charset="-122"/>
                 <a:cs typeface="Calibri" pitchFamily="34" charset="-120"/>
               </a:rPr>
-              <a:t>1. TRADE</a:t>
+              <a:t>DEFINITION</a:t>
             </a:r>
             <a:endParaRPr lang="en-US" sz="1400" dirty="0"/>
           </a:p>
@@ -7896,7 +8074,7 @@
                 <a:ea typeface="Times New Roman" pitchFamily="34" charset="-122"/>
                 <a:cs typeface="Times New Roman" pitchFamily="34" charset="-120"/>
               </a:rPr>
-              <a:t>A market in Cameroon.</a:t>
+              <a:t>A market.</a:t>
             </a:r>
             <a:endParaRPr lang="en-US" sz="1800" dirty="0"/>
           </a:p>
@@ -8008,7 +8186,7 @@
                 <a:ea typeface="Calibri" pitchFamily="34" charset="-122"/>
                 <a:cs typeface="Calibri" pitchFamily="34" charset="-120"/>
               </a:rPr>
-              <a:t>1. TRADE</a:t>
+              <a:t>DEFINITION</a:t>
             </a:r>
             <a:endParaRPr lang="en-US" sz="1400" dirty="0"/>
           </a:p>
@@ -8115,7 +8293,7 @@
                 <a:ea typeface="Times New Roman" pitchFamily="34" charset="-122"/>
                 <a:cs typeface="Times New Roman" pitchFamily="34" charset="-120"/>
               </a:rPr>
-              <a:t>These people buy and sell. What do we call this service?</a:t>
+              <a:t>People buy and sell here. What is this service called?</a:t>
             </a:r>
             <a:endParaRPr lang="en-US" sz="4000" dirty="0"/>
           </a:p>
@@ -8822,7 +9000,7 @@
                 <a:ea typeface="Calibri" pitchFamily="34" charset="-122"/>
                 <a:cs typeface="Calibri" pitchFamily="34" charset="-120"/>
               </a:rPr>
-              <a:t>1. TRADE</a:t>
+              <a:t>DEFINITION</a:t>
             </a:r>
             <a:endParaRPr lang="en-US" sz="1400" dirty="0"/>
           </a:p>
@@ -9041,7 +9219,7 @@
                 <a:ea typeface="Calibri" pitchFamily="34" charset="-122"/>
                 <a:cs typeface="Calibri" pitchFamily="34" charset="-120"/>
               </a:rPr>
-              <a:t>1. TRANSPORT</a:t>
+              <a:t>EXAMPLES</a:t>
             </a:r>
             <a:endParaRPr lang="en-US" sz="1400" dirty="0"/>
           </a:p>
@@ -9143,7 +9321,7 @@
                 <a:ea typeface="Times New Roman" pitchFamily="34" charset="-122"/>
                 <a:cs typeface="Times New Roman" pitchFamily="34" charset="-120"/>
               </a:rPr>
-              <a:t>A train in Cameroon.</a:t>
+              <a:t>A train.</a:t>
             </a:r>
             <a:endParaRPr lang="en-US" sz="1800" dirty="0"/>
           </a:p>
@@ -9255,7 +9433,7 @@
                 <a:ea typeface="Calibri" pitchFamily="34" charset="-122"/>
                 <a:cs typeface="Calibri" pitchFamily="34" charset="-120"/>
               </a:rPr>
-              <a:t>1. TRANSPORT</a:t>
+              <a:t>EXAMPLES</a:t>
             </a:r>
             <a:endParaRPr lang="en-US" sz="1400" dirty="0"/>
           </a:p>
@@ -9362,7 +9540,7 @@
                 <a:ea typeface="Times New Roman" pitchFamily="34" charset="-122"/>
                 <a:cs typeface="Times New Roman" pitchFamily="34" charset="-120"/>
               </a:rPr>
-              <a:t>Name three means of transport used in Cameroon.</a:t>
+              <a:t>Name two means of transport used in Cameroon.</a:t>
             </a:r>
             <a:endParaRPr lang="en-US" sz="4000" dirty="0"/>
           </a:p>
@@ -9474,7 +9652,7 @@
                 <a:ea typeface="Calibri" pitchFamily="34" charset="-122"/>
                 <a:cs typeface="Calibri" pitchFamily="34" charset="-120"/>
               </a:rPr>
-              <a:t>1. TRANSPORT</a:t>
+              <a:t>EXAMPLES</a:t>
             </a:r>
             <a:endParaRPr lang="en-US" sz="1400" dirty="0"/>
           </a:p>
@@ -9581,7 +9759,7 @@
                 <a:ea typeface="Times New Roman" pitchFamily="34" charset="-122"/>
                 <a:cs typeface="Times New Roman" pitchFamily="34" charset="-120"/>
               </a:rPr>
-              <a:t>Road (lorries, buses), train and plane (also boats).</a:t>
+              <a:t>Road and train (also plane and boat).</a:t>
             </a:r>
             <a:endParaRPr lang="en-US" sz="4000" dirty="0"/>
           </a:p>
@@ -9693,7 +9871,7 @@
                 <a:ea typeface="Calibri" pitchFamily="34" charset="-122"/>
                 <a:cs typeface="Calibri" pitchFamily="34" charset="-120"/>
               </a:rPr>
-              <a:t>1. BANKING</a:t>
+              <a:t>EXAMPLES</a:t>
             </a:r>
             <a:endParaRPr lang="en-US" sz="1400" dirty="0"/>
           </a:p>
@@ -9795,7 +9973,7 @@
                 <a:ea typeface="Times New Roman" pitchFamily="34" charset="-122"/>
                 <a:cs typeface="Times New Roman" pitchFamily="34" charset="-120"/>
               </a:rPr>
-              <a:t>A mobile money shop.</a:t>
+              <a:t>Mobile money.</a:t>
             </a:r>
             <a:endParaRPr lang="en-US" sz="1800" dirty="0"/>
           </a:p>
@@ -9907,7 +10085,7 @@
                 <a:ea typeface="Calibri" pitchFamily="34" charset="-122"/>
                 <a:cs typeface="Calibri" pitchFamily="34" charset="-120"/>
               </a:rPr>
-              <a:t>1. BANKING</a:t>
+              <a:t>EXAMPLES</a:t>
             </a:r>
             <a:endParaRPr lang="en-US" sz="1400" dirty="0"/>
           </a:p>
@@ -10126,7 +10304,7 @@
                 <a:ea typeface="Calibri" pitchFamily="34" charset="-122"/>
                 <a:cs typeface="Calibri" pitchFamily="34" charset="-120"/>
               </a:rPr>
-              <a:t>1. BANKING</a:t>
+              <a:t>EXAMPLES</a:t>
             </a:r>
             <a:endParaRPr lang="en-US" sz="1400" dirty="0"/>
           </a:p>
@@ -10233,7 +10411,7 @@
                 <a:ea typeface="Times New Roman" pitchFamily="34" charset="-122"/>
                 <a:cs typeface="Times New Roman" pitchFamily="34" charset="-120"/>
               </a:rPr>
-              <a:t>People can send and keep money with a phone.</a:t>
+              <a:t>They can send and keep money with a phone.</a:t>
             </a:r>
             <a:endParaRPr lang="en-US" sz="4000" dirty="0"/>
           </a:p>
@@ -10345,7 +10523,7 @@
                 <a:ea typeface="Calibri" pitchFamily="34" charset="-122"/>
                 <a:cs typeface="Calibri" pitchFamily="34" charset="-120"/>
               </a:rPr>
-              <a:t>1. SOCIAL SERVICES</a:t>
+              <a:t>EXAMPLES</a:t>
             </a:r>
             <a:endParaRPr lang="en-US" sz="1400" dirty="0"/>
           </a:p>
@@ -10447,7 +10625,7 @@
                 <a:ea typeface="Times New Roman" pitchFamily="34" charset="-122"/>
                 <a:cs typeface="Times New Roman" pitchFamily="34" charset="-120"/>
               </a:rPr>
-              <a:t>A teacher in a classroom.</a:t>
+              <a:t>A classroom.</a:t>
             </a:r>
             <a:endParaRPr lang="en-US" sz="1800" dirty="0"/>
           </a:p>
@@ -10559,7 +10737,7 @@
                 <a:ea typeface="Calibri" pitchFamily="34" charset="-122"/>
                 <a:cs typeface="Calibri" pitchFamily="34" charset="-120"/>
               </a:rPr>
-              <a:t>1. SOCIAL SERVICES</a:t>
+              <a:t>EXAMPLES</a:t>
             </a:r>
             <a:endParaRPr lang="en-US" sz="1400" dirty="0"/>
           </a:p>
@@ -10666,7 +10844,7 @@
                 <a:ea typeface="Times New Roman" pitchFamily="34" charset="-122"/>
                 <a:cs typeface="Times New Roman" pitchFamily="34" charset="-120"/>
               </a:rPr>
-              <a:t>Name two services given by the state.</a:t>
+              <a:t>Name one service given by the state.</a:t>
             </a:r>
             <a:endParaRPr lang="en-US" sz="4000" dirty="0"/>
           </a:p>
@@ -10778,7 +10956,7 @@
                 <a:ea typeface="Calibri" pitchFamily="34" charset="-122"/>
                 <a:cs typeface="Calibri" pitchFamily="34" charset="-120"/>
               </a:rPr>
-              <a:t>1. SOCIAL SERVICES</a:t>
+              <a:t>EXAMPLES</a:t>
             </a:r>
             <a:endParaRPr lang="en-US" sz="1400" dirty="0"/>
           </a:p>
@@ -10885,7 +11063,7 @@
                 <a:ea typeface="Times New Roman" pitchFamily="34" charset="-122"/>
                 <a:cs typeface="Times New Roman" pitchFamily="34" charset="-120"/>
               </a:rPr>
-              <a:t>Schools (education) and hospitals (health).</a:t>
+              <a:t>Education (also health).</a:t>
             </a:r>
             <a:endParaRPr lang="en-US" sz="4000" dirty="0"/>
           </a:p>
@@ -12006,7 +12184,7 @@
                 <a:ea typeface="Calibri" pitchFamily="34" charset="-122"/>
                 <a:cs typeface="Calibri" pitchFamily="34" charset="-120"/>
               </a:rPr>
-              <a:t>1. TOURISM</a:t>
+              <a:t>EXAMPLES</a:t>
             </a:r>
             <a:endParaRPr lang="en-US" sz="1400" dirty="0"/>
           </a:p>
@@ -12108,7 +12286,7 @@
                 <a:ea typeface="Times New Roman" pitchFamily="34" charset="-122"/>
                 <a:cs typeface="Times New Roman" pitchFamily="34" charset="-120"/>
               </a:rPr>
-              <a:t>A leopard in a national park.</a:t>
+              <a:t>Tourists.</a:t>
             </a:r>
             <a:endParaRPr lang="en-US" sz="1800" dirty="0"/>
           </a:p>
@@ -12220,7 +12398,7 @@
                 <a:ea typeface="Calibri" pitchFamily="34" charset="-122"/>
                 <a:cs typeface="Calibri" pitchFamily="34" charset="-120"/>
               </a:rPr>
-              <a:t>1. TOURISM</a:t>
+              <a:t>EXAMPLES</a:t>
             </a:r>
             <a:endParaRPr lang="en-US" sz="1400" dirty="0"/>
           </a:p>
@@ -12439,7 +12617,7 @@
                 <a:ea typeface="Calibri" pitchFamily="34" charset="-122"/>
                 <a:cs typeface="Calibri" pitchFamily="34" charset="-120"/>
               </a:rPr>
-              <a:t>1. TOURISM</a:t>
+              <a:t>EXAMPLES</a:t>
             </a:r>
             <a:endParaRPr lang="en-US" sz="1400" dirty="0"/>
           </a:p>
@@ -12546,7 +12724,7 @@
                 <a:ea typeface="Times New Roman" pitchFamily="34" charset="-122"/>
                 <a:cs typeface="Times New Roman" pitchFamily="34" charset="-120"/>
               </a:rPr>
-              <a:t>To see wild animals in the Waza and Bénoué parks.</a:t>
+              <a:t>To see animals in the Waza and Bénoué parks.</a:t>
             </a:r>
             <a:endParaRPr lang="en-US" sz="4000" dirty="0"/>
           </a:p>
@@ -12757,7 +12935,7 @@
               <a:buNone/>
             </a:pPr>
             <a:r>
-              <a:rPr lang="en-US" sz="4000" b="1" dirty="0">
+              <a:rPr lang="en-US" sz="3200" b="1" dirty="0">
                 <a:solidFill>
                   <a:srgbClr val="111111"/>
                 </a:solidFill>
@@ -12767,7 +12945,7 @@
               </a:rPr>
               <a:t>Topic: Economic Activities</a:t>
             </a:r>
-            <a:endParaRPr lang="en-US" sz="4000" dirty="0"/>
+            <a:endParaRPr lang="en-US" sz="3200" dirty="0"/>
           </a:p>
           <a:p>
             <a:pPr algn="l" indent="0" marL="0">
@@ -12777,7 +12955,7 @@
               <a:buNone/>
             </a:pPr>
             <a:r>
-              <a:rPr lang="en-US" sz="4000" b="1" dirty="0">
+              <a:rPr lang="en-US" sz="3200" b="1" dirty="0">
                 <a:solidFill>
                   <a:srgbClr val="111111"/>
                 </a:solidFill>
@@ -12787,7 +12965,7 @@
               </a:rPr>
               <a:t>Sub-topic: Sectors of the Economy</a:t>
             </a:r>
-            <a:endParaRPr lang="en-US" sz="4000" dirty="0"/>
+            <a:endParaRPr lang="en-US" sz="3200" dirty="0"/>
           </a:p>
           <a:p>
             <a:pPr algn="l" indent="0" marL="0">
@@ -12797,7 +12975,7 @@
               <a:buNone/>
             </a:pPr>
             <a:r>
-              <a:rPr lang="en-US" sz="4000" b="1" dirty="0">
+              <a:rPr lang="en-US" sz="3200" b="1" dirty="0">
                 <a:solidFill>
                   <a:srgbClr val="990011"/>
                 </a:solidFill>
@@ -12807,7 +12985,7 @@
               </a:rPr>
               <a:t>Lesson 5 (Part 5): The Sectors of the Economy: The Tertiary Sector (Definition and Examples)</a:t>
             </a:r>
-            <a:endParaRPr lang="en-US" sz="4000" dirty="0"/>
+            <a:endParaRPr lang="en-US" sz="3200" dirty="0"/>
           </a:p>
         </p:txBody>
       </p:sp>
@@ -13029,11 +13207,12 @@
             <a:endParaRPr lang="en-US" sz="4000" dirty="0"/>
           </a:p>
           <a:p>
-            <a:pPr algn="l" indent="0" marL="0">
+            <a:pPr algn="l" marL="342900" indent="-342900">
               <a:spcAft>
                 <a:spcPts val="800"/>
               </a:spcAft>
-              <a:buNone/>
+              <a:buSzPct val="100000"/>
+              <a:buChar char="•"/>
             </a:pPr>
             <a:r>
               <a:rPr lang="en-US" sz="4000" b="1" dirty="0">
@@ -13046,11 +13225,12 @@
               </a:rPr>
               <a:t>Tertiary sector: </a:t>
             </a:r>
-            <a:pPr algn="l" indent="0" marL="0">
+            <a:pPr algn="l" marL="342900" indent="-342900">
               <a:spcAft>
                 <a:spcPts val="800"/>
               </a:spcAft>
-              <a:buNone/>
+              <a:buSzPct val="100000"/>
+              <a:buChar char="•"/>
             </a:pPr>
             <a:r>
               <a:rPr lang="en-US" sz="4000" dirty="0">
@@ -13061,7 +13241,7 @@
                 <a:ea typeface="Times New Roman" pitchFamily="34" charset="-122"/>
                 <a:cs typeface="Times New Roman" pitchFamily="34" charset="-120"/>
               </a:rPr>
-              <a:t>It is the sector that gives services to people.</a:t>
+              <a:t>It is made of activities that give services to people.</a:t>
             </a:r>
             <a:endParaRPr lang="en-US" sz="4000" dirty="0"/>
           </a:p>
@@ -13179,9 +13359,131 @@
           </a:p>
         </p:txBody>
       </p:sp>
+      <p:sp>
+        <p:nvSpPr>
+          <p:cNvPr id="3" name="Text 1"/>
+          <p:cNvSpPr/>
+          <p:nvPr/>
+        </p:nvSpPr>
+        <p:spPr>
+          <a:xfrm>
+            <a:off x="365760" y="1005840"/>
+            <a:ext cx="11460175" cy="731520"/>
+          </a:xfrm>
+          <a:prstGeom prst="rect">
+            <a:avLst/>
+          </a:prstGeom>
+          <a:noFill/>
+          <a:ln/>
+        </p:spPr>
+        <p:txBody>
+          <a:bodyPr wrap="square" lIns="0" tIns="0" rIns="0" bIns="0" rtlCol="0" anchor="ctr">
+            <a:normAutofit/>
+          </a:bodyPr>
+          <a:lstStyle/>
+          <a:p>
+            <a:pPr algn="ctr" indent="0" marL="0">
+              <a:buNone/>
+            </a:pPr>
+            <a:r>
+              <a:rPr lang="en-US" sz="3600" b="1" dirty="0">
+                <a:solidFill>
+                  <a:srgbClr val="990011"/>
+                </a:solidFill>
+                <a:latin typeface="Times New Roman" pitchFamily="34" charset="0"/>
+                <a:ea typeface="Times New Roman" pitchFamily="34" charset="-122"/>
+                <a:cs typeface="Times New Roman" pitchFamily="34" charset="-120"/>
+              </a:rPr>
+              <a:t>Examples of Tertiary Activities</a:t>
+            </a:r>
+            <a:endParaRPr lang="en-US" sz="3600" dirty="0"/>
+          </a:p>
+        </p:txBody>
+      </p:sp>
+      <p:sp>
+        <p:nvSpPr>
+          <p:cNvPr id="4" name="Text 2"/>
+          <p:cNvSpPr/>
+          <p:nvPr/>
+        </p:nvSpPr>
+        <p:spPr>
+          <a:xfrm>
+            <a:off x="365760" y="1783080"/>
+            <a:ext cx="4846320" cy="4617720"/>
+          </a:xfrm>
+          <a:prstGeom prst="rect">
+            <a:avLst/>
+          </a:prstGeom>
+          <a:noFill/>
+          <a:ln/>
+        </p:spPr>
+        <p:txBody>
+          <a:bodyPr wrap="square" lIns="0" tIns="0" rIns="0" bIns="0" rtlCol="0" anchor="t"/>
+          <a:lstStyle/>
+          <a:p>
+            <a:pPr algn="l" indent="0" marL="0">
+              <a:spcAft>
+                <a:spcPts val="800"/>
+              </a:spcAft>
+              <a:buNone/>
+            </a:pPr>
+            <a:r>
+              <a:rPr lang="en-US" sz="3600" i="1" dirty="0">
+                <a:solidFill>
+                  <a:srgbClr val="111111"/>
+                </a:solidFill>
+                <a:latin typeface="Times New Roman" pitchFamily="34" charset="0"/>
+                <a:ea typeface="Times New Roman" pitchFamily="34" charset="-122"/>
+                <a:cs typeface="Times New Roman" pitchFamily="34" charset="-120"/>
+              </a:rPr>
+              <a:t>The tertiary sector includes the following activities:</a:t>
+            </a:r>
+            <a:endParaRPr lang="en-US" sz="3600" dirty="0"/>
+          </a:p>
+          <a:p>
+            <a:pPr algn="l" marL="342900" indent="-342900">
+              <a:spcAft>
+                <a:spcPts val="800"/>
+              </a:spcAft>
+              <a:buSzPct val="100000"/>
+              <a:buChar char="•"/>
+            </a:pPr>
+            <a:r>
+              <a:rPr lang="en-US" sz="3600" b="1" dirty="0">
+                <a:solidFill>
+                  <a:srgbClr val="111111"/>
+                </a:solidFill>
+                <a:latin typeface="Times New Roman" pitchFamily="34" charset="0"/>
+                <a:ea typeface="Times New Roman" pitchFamily="34" charset="-122"/>
+                <a:cs typeface="Times New Roman" pitchFamily="34" charset="-120"/>
+              </a:rPr>
+              <a:t>Trade: </a:t>
+            </a:r>
+            <a:pPr algn="l" marL="342900" indent="-342900">
+              <a:spcAft>
+                <a:spcPts val="800"/>
+              </a:spcAft>
+              <a:buSzPct val="100000"/>
+              <a:buChar char="•"/>
+            </a:pPr>
+            <a:r>
+              <a:rPr lang="en-US" sz="3600" dirty="0">
+                <a:solidFill>
+                  <a:srgbClr val="111111"/>
+                </a:solidFill>
+                <a:latin typeface="Times New Roman" pitchFamily="34" charset="0"/>
+                <a:ea typeface="Times New Roman" pitchFamily="34" charset="-122"/>
+                <a:cs typeface="Times New Roman" pitchFamily="34" charset="-120"/>
+              </a:rPr>
+              <a:t>Buying and selling in markets and shops.</a:t>
+            </a:r>
+            <a:endParaRPr lang="en-US" sz="3600" dirty="0"/>
+          </a:p>
+        </p:txBody>
+      </p:sp>
       <p:pic>
         <p:nvPicPr>
-          <p:cNvPr id="3" name="Image 0" descr="/home/claude/f4/img/minesec_sheet.png">    </p:cNvPr>
+          <p:cNvPr id="5" name="Image 0" descr="/home/claude/f4/img/v2/f2t_market.jpg">    </p:cNvPr>
           <p:cNvPicPr>
             <a:picLocks noChangeAspect="1"/>
           </p:cNvPicPr>
@@ -13195,8 +13497,8 @@
         </p:blipFill>
         <p:spPr>
           <a:xfrm>
-            <a:off x="0" y="658368"/>
-            <a:ext cx="3840480" cy="5833872"/>
+            <a:off x="5349240" y="2071212"/>
+            <a:ext cx="6659575" cy="3693983"/>
           </a:xfrm>
           <a:prstGeom prst="rect">
             <a:avLst/>
@@ -13205,14 +13507,14 @@
       </p:pic>
       <p:sp>
         <p:nvSpPr>
-          <p:cNvPr id="4" name="Text 1"/>
+          <p:cNvPr id="6" name="Text 3"/>
           <p:cNvSpPr/>
           <p:nvPr/>
         </p:nvSpPr>
         <p:spPr>
           <a:xfrm>
-            <a:off x="4069080" y="1005840"/>
-            <a:ext cx="7802575" cy="731520"/>
+            <a:off x="5349240" y="6089904"/>
+            <a:ext cx="6659575" cy="347472"/>
           </a:xfrm>
           <a:prstGeom prst="rect">
             <a:avLst/>
@@ -13221,142 +13523,24 @@
           <a:ln/>
         </p:spPr>
         <p:txBody>
-          <a:bodyPr wrap="square" lIns="0" tIns="0" rIns="0" bIns="0" rtlCol="0" anchor="ctr">
-            <a:normAutofit/>
-          </a:bodyPr>
+          <a:bodyPr wrap="square" lIns="0" tIns="0" rIns="0" bIns="0" rtlCol="0" anchor="ctr"/>
           <a:lstStyle/>
           <a:p>
             <a:pPr algn="ctr" indent="0" marL="0">
               <a:buNone/>
             </a:pPr>
             <a:r>
-              <a:rPr lang="en-US" sz="3600" b="1" dirty="0">
-                <a:solidFill>
-                  <a:srgbClr val="990011"/>
+              <a:rPr lang="en-US" sz="1600" i="1" dirty="0">
+                <a:solidFill>
+                  <a:srgbClr val="555555"/>
                 </a:solidFill>
                 <a:latin typeface="Times New Roman" pitchFamily="34" charset="0"/>
                 <a:ea typeface="Times New Roman" pitchFamily="34" charset="-122"/>
                 <a:cs typeface="Times New Roman" pitchFamily="34" charset="-120"/>
               </a:rPr>
-              <a:t>1. Examples of the Tertiary Sector</a:t>
-            </a:r>
-            <a:endParaRPr lang="en-US" sz="3600" dirty="0"/>
-          </a:p>
-        </p:txBody>
-      </p:sp>
-      <p:sp>
-        <p:nvSpPr>
-          <p:cNvPr id="5" name="Text 2"/>
-          <p:cNvSpPr/>
-          <p:nvPr/>
-        </p:nvSpPr>
-        <p:spPr>
-          <a:xfrm>
-            <a:off x="4069080" y="1783080"/>
-            <a:ext cx="7802575" cy="4663440"/>
-          </a:xfrm>
-          <a:prstGeom prst="rect">
-            <a:avLst/>
-          </a:prstGeom>
-          <a:noFill/>
-          <a:ln/>
-        </p:spPr>
-        <p:txBody>
-          <a:bodyPr wrap="square" lIns="0" tIns="0" rIns="0" bIns="0" rtlCol="0" anchor="t"/>
-          <a:lstStyle/>
-          <a:p>
-            <a:pPr algn="l" indent="0" marL="0">
-              <a:spcAft>
-                <a:spcPts val="800"/>
-              </a:spcAft>
-              <a:buNone/>
-            </a:pPr>
-            <a:r>
-              <a:rPr lang="en-US" sz="4000" i="1" dirty="0">
-                <a:solidFill>
-                  <a:srgbClr val="111111"/>
-                </a:solidFill>
-                <a:latin typeface="Times New Roman" pitchFamily="34" charset="0"/>
-                <a:ea typeface="Times New Roman" pitchFamily="34" charset="-122"/>
-                <a:cs typeface="Times New Roman" pitchFamily="34" charset="-120"/>
-              </a:rPr>
-              <a:t>The tertiary sector in Cameroon includes the following services:</a:t>
-            </a:r>
-            <a:endParaRPr lang="en-US" sz="4000" dirty="0"/>
-          </a:p>
-          <a:p>
-            <a:pPr algn="l" indent="0" marL="0">
-              <a:spcAft>
-                <a:spcPts val="800"/>
-              </a:spcAft>
-              <a:buNone/>
-            </a:pPr>
-            <a:r>
-              <a:rPr lang="en-US" sz="4000" b="1" dirty="0">
-                <a:solidFill>
-                  <a:srgbClr val="111111"/>
-                </a:solidFill>
-                <a:latin typeface="Times New Roman" pitchFamily="34" charset="0"/>
-                <a:ea typeface="Times New Roman" pitchFamily="34" charset="-122"/>
-                <a:cs typeface="Times New Roman" pitchFamily="34" charset="-120"/>
-              </a:rPr>
-              <a:t>Trade: </a:t>
-            </a:r>
-            <a:pPr algn="l" indent="0" marL="0">
-              <a:spcAft>
-                <a:spcPts val="800"/>
-              </a:spcAft>
-              <a:buNone/>
-            </a:pPr>
-            <a:r>
-              <a:rPr lang="en-US" sz="4000" dirty="0">
-                <a:solidFill>
-                  <a:srgbClr val="111111"/>
-                </a:solidFill>
-                <a:latin typeface="Times New Roman" pitchFamily="34" charset="0"/>
-                <a:ea typeface="Times New Roman" pitchFamily="34" charset="-122"/>
-                <a:cs typeface="Times New Roman" pitchFamily="34" charset="-120"/>
-              </a:rPr>
-              <a:t>Goods are bought and sold in markets, shops and supermarkets.</a:t>
-            </a:r>
-            <a:endParaRPr lang="en-US" sz="4000" dirty="0"/>
-          </a:p>
-          <a:p>
-            <a:pPr algn="l" indent="0" marL="0">
-              <a:spcAft>
-                <a:spcPts val="800"/>
-              </a:spcAft>
-              <a:buNone/>
-            </a:pPr>
-            <a:r>
-              <a:rPr lang="en-US" sz="4000" b="1" dirty="0">
-                <a:solidFill>
-                  <a:srgbClr val="111111"/>
-                </a:solidFill>
-                <a:latin typeface="Times New Roman" pitchFamily="34" charset="0"/>
-                <a:ea typeface="Times New Roman" pitchFamily="34" charset="-122"/>
-                <a:cs typeface="Times New Roman" pitchFamily="34" charset="-120"/>
-              </a:rPr>
-              <a:t>Transport: </a:t>
-            </a:r>
-            <a:pPr algn="l" indent="0" marL="0">
-              <a:spcAft>
-                <a:spcPts val="800"/>
-              </a:spcAft>
-              <a:buNone/>
-            </a:pPr>
-            <a:r>
-              <a:rPr lang="en-US" sz="4000" dirty="0">
-                <a:solidFill>
-                  <a:srgbClr val="111111"/>
-                </a:solidFill>
-                <a:latin typeface="Times New Roman" pitchFamily="34" charset="0"/>
-                <a:ea typeface="Times New Roman" pitchFamily="34" charset="-122"/>
-                <a:cs typeface="Times New Roman" pitchFamily="34" charset="-120"/>
-              </a:rPr>
-              <a:t>People and goods move by road, train, plane and boat.</a:t>
-            </a:r>
-            <a:endParaRPr lang="en-US" sz="4000" dirty="0"/>
+              <a:t>Illustration: a market</a:t>
+            </a:r>
+            <a:endParaRPr lang="en-US" sz="1600" dirty="0"/>
           </a:p>
         </p:txBody>
       </p:sp>
@@ -13472,9 +13656,111 @@
           </a:p>
         </p:txBody>
       </p:sp>
+      <p:sp>
+        <p:nvSpPr>
+          <p:cNvPr id="3" name="Text 1"/>
+          <p:cNvSpPr/>
+          <p:nvPr/>
+        </p:nvSpPr>
+        <p:spPr>
+          <a:xfrm>
+            <a:off x="365760" y="1005840"/>
+            <a:ext cx="11460175" cy="731520"/>
+          </a:xfrm>
+          <a:prstGeom prst="rect">
+            <a:avLst/>
+          </a:prstGeom>
+          <a:noFill/>
+          <a:ln/>
+        </p:spPr>
+        <p:txBody>
+          <a:bodyPr wrap="square" lIns="0" tIns="0" rIns="0" bIns="0" rtlCol="0" anchor="ctr">
+            <a:normAutofit/>
+          </a:bodyPr>
+          <a:lstStyle/>
+          <a:p>
+            <a:pPr algn="ctr" indent="0" marL="0">
+              <a:buNone/>
+            </a:pPr>
+            <a:r>
+              <a:rPr lang="en-US" sz="3600" b="1" dirty="0">
+                <a:solidFill>
+                  <a:srgbClr val="990011"/>
+                </a:solidFill>
+                <a:latin typeface="Times New Roman" pitchFamily="34" charset="0"/>
+                <a:ea typeface="Times New Roman" pitchFamily="34" charset="-122"/>
+                <a:cs typeface="Times New Roman" pitchFamily="34" charset="-120"/>
+              </a:rPr>
+              <a:t>Examples of Tertiary Activities</a:t>
+            </a:r>
+            <a:endParaRPr lang="en-US" sz="3600" dirty="0"/>
+          </a:p>
+        </p:txBody>
+      </p:sp>
+      <p:sp>
+        <p:nvSpPr>
+          <p:cNvPr id="4" name="Text 2"/>
+          <p:cNvSpPr/>
+          <p:nvPr/>
+        </p:nvSpPr>
+        <p:spPr>
+          <a:xfrm>
+            <a:off x="365760" y="1783080"/>
+            <a:ext cx="4846320" cy="4617720"/>
+          </a:xfrm>
+          <a:prstGeom prst="rect">
+            <a:avLst/>
+          </a:prstGeom>
+          <a:noFill/>
+          <a:ln/>
+        </p:spPr>
+        <p:txBody>
+          <a:bodyPr wrap="square" lIns="0" tIns="0" rIns="0" bIns="0" rtlCol="0" anchor="t"/>
+          <a:lstStyle/>
+          <a:p>
+            <a:pPr algn="l" marL="342900" indent="-342900">
+              <a:spcAft>
+                <a:spcPts val="800"/>
+              </a:spcAft>
+              <a:buSzPct val="100000"/>
+              <a:buChar char="•"/>
+            </a:pPr>
+            <a:r>
+              <a:rPr lang="en-US" sz="3600" b="1" dirty="0">
+                <a:solidFill>
+                  <a:srgbClr val="111111"/>
+                </a:solidFill>
+                <a:latin typeface="Times New Roman" pitchFamily="34" charset="0"/>
+                <a:ea typeface="Times New Roman" pitchFamily="34" charset="-122"/>
+                <a:cs typeface="Times New Roman" pitchFamily="34" charset="-120"/>
+              </a:rPr>
+              <a:t>Transport: </a:t>
+            </a:r>
+            <a:pPr algn="l" marL="342900" indent="-342900">
+              <a:spcAft>
+                <a:spcPts val="800"/>
+              </a:spcAft>
+              <a:buSzPct val="100000"/>
+              <a:buChar char="•"/>
+            </a:pPr>
+            <a:r>
+              <a:rPr lang="en-US" sz="3600" dirty="0">
+                <a:solidFill>
+                  <a:srgbClr val="111111"/>
+                </a:solidFill>
+                <a:latin typeface="Times New Roman" pitchFamily="34" charset="0"/>
+                <a:ea typeface="Times New Roman" pitchFamily="34" charset="-122"/>
+                <a:cs typeface="Times New Roman" pitchFamily="34" charset="-120"/>
+              </a:rPr>
+              <a:t>Roads, railways, air and water transport.</a:t>
+            </a:r>
+            <a:endParaRPr lang="en-US" sz="3600" dirty="0"/>
+          </a:p>
+        </p:txBody>
+      </p:sp>
       <p:pic>
         <p:nvPicPr>
-          <p:cNvPr id="3" name="Image 0" descr="/home/claude/f4/img/minesec_sheet.png">    </p:cNvPr>
+          <p:cNvPr id="5" name="Image 0" descr="/home/claude/f4/img/v2/f2t_train.jpg">    </p:cNvPr>
           <p:cNvPicPr>
             <a:picLocks noChangeAspect="1"/>
           </p:cNvPicPr>
@@ -13488,8 +13774,8 @@
         </p:blipFill>
         <p:spPr>
           <a:xfrm>
-            <a:off x="0" y="658368"/>
-            <a:ext cx="3840480" cy="5833872"/>
+            <a:off x="5349240" y="2071212"/>
+            <a:ext cx="6659575" cy="3693983"/>
           </a:xfrm>
           <a:prstGeom prst="rect">
             <a:avLst/>
@@ -13498,14 +13784,14 @@
       </p:pic>
       <p:sp>
         <p:nvSpPr>
-          <p:cNvPr id="4" name="Text 1"/>
+          <p:cNvPr id="6" name="Text 3"/>
           <p:cNvSpPr/>
           <p:nvPr/>
         </p:nvSpPr>
         <p:spPr>
           <a:xfrm>
-            <a:off x="4069080" y="1005840"/>
-            <a:ext cx="7802575" cy="731520"/>
+            <a:off x="5349240" y="6089904"/>
+            <a:ext cx="6659575" cy="347472"/>
           </a:xfrm>
           <a:prstGeom prst="rect">
             <a:avLst/>
@@ -13514,159 +13800,24 @@
           <a:ln/>
         </p:spPr>
         <p:txBody>
-          <a:bodyPr wrap="square" lIns="0" tIns="0" rIns="0" bIns="0" rtlCol="0" anchor="ctr">
-            <a:normAutofit/>
-          </a:bodyPr>
+          <a:bodyPr wrap="square" lIns="0" tIns="0" rIns="0" bIns="0" rtlCol="0" anchor="ctr"/>
           <a:lstStyle/>
           <a:p>
             <a:pPr algn="ctr" indent="0" marL="0">
               <a:buNone/>
             </a:pPr>
             <a:r>
-              <a:rPr lang="en-US" sz="3600" b="1" dirty="0">
-                <a:solidFill>
-                  <a:srgbClr val="990011"/>
+              <a:rPr lang="en-US" sz="1600" i="1" dirty="0">
+                <a:solidFill>
+                  <a:srgbClr val="555555"/>
                 </a:solidFill>
                 <a:latin typeface="Times New Roman" pitchFamily="34" charset="0"/>
                 <a:ea typeface="Times New Roman" pitchFamily="34" charset="-122"/>
                 <a:cs typeface="Times New Roman" pitchFamily="34" charset="-120"/>
               </a:rPr>
-              <a:t>1. Examples of the Tertiary Sector (continued)</a:t>
-            </a:r>
-            <a:endParaRPr lang="en-US" sz="3600" dirty="0"/>
-          </a:p>
-        </p:txBody>
-      </p:sp>
-      <p:sp>
-        <p:nvSpPr>
-          <p:cNvPr id="5" name="Text 2"/>
-          <p:cNvSpPr/>
-          <p:nvPr/>
-        </p:nvSpPr>
-        <p:spPr>
-          <a:xfrm>
-            <a:off x="4069080" y="1783080"/>
-            <a:ext cx="7802575" cy="4663440"/>
-          </a:xfrm>
-          <a:prstGeom prst="rect">
-            <a:avLst/>
-          </a:prstGeom>
-          <a:noFill/>
-          <a:ln/>
-        </p:spPr>
-        <p:txBody>
-          <a:bodyPr wrap="square" lIns="0" tIns="0" rIns="0" bIns="0" rtlCol="0" anchor="t"/>
-          <a:lstStyle/>
-          <a:p>
-            <a:pPr algn="l" indent="0" marL="0">
-              <a:spcAft>
-                <a:spcPts val="800"/>
-              </a:spcAft>
-              <a:buNone/>
-            </a:pPr>
-            <a:r>
-              <a:rPr lang="en-US" sz="4000" b="1" dirty="0">
-                <a:solidFill>
-                  <a:srgbClr val="111111"/>
-                </a:solidFill>
-                <a:latin typeface="Times New Roman" pitchFamily="34" charset="0"/>
-                <a:ea typeface="Times New Roman" pitchFamily="34" charset="-122"/>
-                <a:cs typeface="Times New Roman" pitchFamily="34" charset="-120"/>
-              </a:rPr>
-              <a:t>Banking: </a:t>
-            </a:r>
-            <a:pPr algn="l" indent="0" marL="0">
-              <a:spcAft>
-                <a:spcPts val="800"/>
-              </a:spcAft>
-              <a:buNone/>
-            </a:pPr>
-            <a:r>
-              <a:rPr lang="en-US" sz="4000" dirty="0">
-                <a:solidFill>
-                  <a:srgbClr val="111111"/>
-                </a:solidFill>
-                <a:latin typeface="Times New Roman" pitchFamily="34" charset="0"/>
-                <a:ea typeface="Times New Roman" pitchFamily="34" charset="-122"/>
-                <a:cs typeface="Times New Roman" pitchFamily="34" charset="-120"/>
-              </a:rPr>
-              <a:t>Banks and mobile money keep and transfer money.</a:t>
-            </a:r>
-            <a:endParaRPr lang="en-US" sz="4000" dirty="0"/>
-          </a:p>
-          <a:p>
-            <a:pPr algn="l" indent="0" marL="0">
-              <a:spcAft>
-                <a:spcPts val="800"/>
-              </a:spcAft>
-              <a:buNone/>
-            </a:pPr>
-            <a:r>
-              <a:rPr lang="en-US" sz="4000" b="1" dirty="0">
-                <a:solidFill>
-                  <a:srgbClr val="111111"/>
-                </a:solidFill>
-                <a:latin typeface="Times New Roman" pitchFamily="34" charset="0"/>
-                <a:ea typeface="Times New Roman" pitchFamily="34" charset="-122"/>
-                <a:cs typeface="Times New Roman" pitchFamily="34" charset="-120"/>
-              </a:rPr>
-              <a:t>Social services: </a:t>
-            </a:r>
-            <a:pPr algn="l" indent="0" marL="0">
-              <a:spcAft>
-                <a:spcPts val="800"/>
-              </a:spcAft>
-              <a:buNone/>
-            </a:pPr>
-            <a:r>
-              <a:rPr lang="en-US" sz="4000" dirty="0">
-                <a:solidFill>
-                  <a:srgbClr val="111111"/>
-                </a:solidFill>
-                <a:latin typeface="Times New Roman" pitchFamily="34" charset="0"/>
-                <a:ea typeface="Times New Roman" pitchFamily="34" charset="-122"/>
-                <a:cs typeface="Times New Roman" pitchFamily="34" charset="-120"/>
-              </a:rPr>
-              <a:t>Schools and hospitals serve the population.</a:t>
-            </a:r>
-            <a:endParaRPr lang="en-US" sz="4000" dirty="0"/>
-          </a:p>
-          <a:p>
-            <a:pPr algn="l" indent="0" marL="0">
-              <a:spcAft>
-                <a:spcPts val="800"/>
-              </a:spcAft>
-              <a:buNone/>
-            </a:pPr>
-            <a:r>
-              <a:rPr lang="en-US" sz="4000" b="1" dirty="0">
-                <a:solidFill>
-                  <a:srgbClr val="111111"/>
-                </a:solidFill>
-                <a:latin typeface="Times New Roman" pitchFamily="34" charset="0"/>
-                <a:ea typeface="Times New Roman" pitchFamily="34" charset="-122"/>
-                <a:cs typeface="Times New Roman" pitchFamily="34" charset="-120"/>
-              </a:rPr>
-              <a:t>Tourism: </a:t>
-            </a:r>
-            <a:pPr algn="l" indent="0" marL="0">
-              <a:spcAft>
-                <a:spcPts val="800"/>
-              </a:spcAft>
-              <a:buNone/>
-            </a:pPr>
-            <a:r>
-              <a:rPr lang="en-US" sz="4000" dirty="0">
-                <a:solidFill>
-                  <a:srgbClr val="111111"/>
-                </a:solidFill>
-                <a:latin typeface="Times New Roman" pitchFamily="34" charset="0"/>
-                <a:ea typeface="Times New Roman" pitchFamily="34" charset="-122"/>
-                <a:cs typeface="Times New Roman" pitchFamily="34" charset="-120"/>
-              </a:rPr>
-              <a:t>Tourists visit the Waza and Benue parks and the beaches of Kribi.</a:t>
-            </a:r>
-            <a:endParaRPr lang="en-US" sz="4000" dirty="0"/>
+              <a:t>Illustration: a train</a:t>
+            </a:r>
+            <a:endParaRPr lang="en-US" sz="1600" dirty="0"/>
           </a:p>
         </p:txBody>
       </p:sp>
@@ -13776,7 +13927,7 @@
                 <a:ea typeface="Calibri" pitchFamily="34" charset="-122"/>
                 <a:cs typeface="Calibri" pitchFamily="34" charset="-120"/>
               </a:rPr>
-              <a:t>FORMATIVE EVALUATION</a:t>
+              <a:t>BOARD SUMMARY</a:t>
             </a:r>
             <a:endParaRPr lang="en-US" sz="1400" dirty="0"/>
           </a:p>
@@ -13841,7 +13992,7 @@
                 <a:ea typeface="Times New Roman" pitchFamily="34" charset="-122"/>
                 <a:cs typeface="Times New Roman" pitchFamily="34" charset="-120"/>
               </a:rPr>
-              <a:t>Evaluation 1</a:t>
+              <a:t>Examples of Tertiary Activities</a:t>
             </a:r>
             <a:endParaRPr lang="en-US" sz="3600" dirty="0"/>
           </a:p>
@@ -13868,14 +14019,15 @@
           <a:bodyPr wrap="square" lIns="0" tIns="0" rIns="0" bIns="0" rtlCol="0" anchor="t"/>
           <a:lstStyle/>
           <a:p>
-            <a:pPr algn="l" indent="0" marL="0">
+            <a:pPr algn="l" marL="342900" indent="-342900">
               <a:spcAft>
                 <a:spcPts val="800"/>
               </a:spcAft>
-              <a:buNone/>
+              <a:buSzPct val="100000"/>
+              <a:buChar char="•"/>
             </a:pPr>
             <a:r>
-              <a:rPr lang="en-US" sz="4000" dirty="0">
+              <a:rPr lang="en-US" sz="4000" b="1" dirty="0">
                 <a:solidFill>
                   <a:srgbClr val="111111"/>
                 </a:solidFill>
@@ -13883,7 +14035,103 @@
                 <a:ea typeface="Times New Roman" pitchFamily="34" charset="-122"/>
                 <a:cs typeface="Times New Roman" pitchFamily="34" charset="-120"/>
               </a:rPr>
-              <a:t>What is the tertiary sector?</a:t>
+              <a:t>Banking and mobile money: </a:t>
+            </a:r>
+            <a:pPr algn="l" marL="342900" indent="-342900">
+              <a:spcAft>
+                <a:spcPts val="800"/>
+              </a:spcAft>
+              <a:buSzPct val="100000"/>
+              <a:buChar char="•"/>
+            </a:pPr>
+            <a:r>
+              <a:rPr lang="en-US" sz="4000" dirty="0">
+                <a:solidFill>
+                  <a:srgbClr val="111111"/>
+                </a:solidFill>
+                <a:latin typeface="Times New Roman" pitchFamily="34" charset="0"/>
+                <a:ea typeface="Times New Roman" pitchFamily="34" charset="-122"/>
+                <a:cs typeface="Times New Roman" pitchFamily="34" charset="-120"/>
+              </a:rPr>
+              <a:t>Keeping and sending money.</a:t>
+            </a:r>
+            <a:endParaRPr lang="en-US" sz="4000" dirty="0"/>
+          </a:p>
+          <a:p>
+            <a:pPr algn="l" marL="342900" indent="-342900">
+              <a:spcAft>
+                <a:spcPts val="800"/>
+              </a:spcAft>
+              <a:buSzPct val="100000"/>
+              <a:buChar char="•"/>
+            </a:pPr>
+            <a:r>
+              <a:rPr lang="en-US" sz="4000" b="1" dirty="0">
+                <a:solidFill>
+                  <a:srgbClr val="111111"/>
+                </a:solidFill>
+                <a:latin typeface="Times New Roman" pitchFamily="34" charset="0"/>
+                <a:ea typeface="Times New Roman" pitchFamily="34" charset="-122"/>
+                <a:cs typeface="Times New Roman" pitchFamily="34" charset="-120"/>
+              </a:rPr>
+              <a:t>Education and health: </a:t>
+            </a:r>
+            <a:pPr algn="l" marL="342900" indent="-342900">
+              <a:spcAft>
+                <a:spcPts val="800"/>
+              </a:spcAft>
+              <a:buSzPct val="100000"/>
+              <a:buChar char="•"/>
+            </a:pPr>
+            <a:r>
+              <a:rPr lang="en-US" sz="4000" dirty="0">
+                <a:solidFill>
+                  <a:srgbClr val="111111"/>
+                </a:solidFill>
+                <a:latin typeface="Times New Roman" pitchFamily="34" charset="0"/>
+                <a:ea typeface="Times New Roman" pitchFamily="34" charset="-122"/>
+                <a:cs typeface="Times New Roman" pitchFamily="34" charset="-120"/>
+              </a:rPr>
+              <a:t>Schools and hospitals.</a:t>
+            </a:r>
+            <a:endParaRPr lang="en-US" sz="4000" dirty="0"/>
+          </a:p>
+          <a:p>
+            <a:pPr algn="l" marL="342900" indent="-342900">
+              <a:spcAft>
+                <a:spcPts val="800"/>
+              </a:spcAft>
+              <a:buSzPct val="100000"/>
+              <a:buChar char="•"/>
+            </a:pPr>
+            <a:r>
+              <a:rPr lang="en-US" sz="4000" b="1" dirty="0">
+                <a:solidFill>
+                  <a:srgbClr val="111111"/>
+                </a:solidFill>
+                <a:latin typeface="Times New Roman" pitchFamily="34" charset="0"/>
+                <a:ea typeface="Times New Roman" pitchFamily="34" charset="-122"/>
+                <a:cs typeface="Times New Roman" pitchFamily="34" charset="-120"/>
+              </a:rPr>
+              <a:t>Communication: </a:t>
+            </a:r>
+            <a:pPr algn="l" marL="342900" indent="-342900">
+              <a:spcAft>
+                <a:spcPts val="800"/>
+              </a:spcAft>
+              <a:buSzPct val="100000"/>
+              <a:buChar char="•"/>
+            </a:pPr>
+            <a:r>
+              <a:rPr lang="en-US" sz="4000" dirty="0">
+                <a:solidFill>
+                  <a:srgbClr val="111111"/>
+                </a:solidFill>
+                <a:latin typeface="Times New Roman" pitchFamily="34" charset="0"/>
+                <a:ea typeface="Times New Roman" pitchFamily="34" charset="-122"/>
+                <a:cs typeface="Times New Roman" pitchFamily="34" charset="-120"/>
+              </a:rPr>
+              <a:t>Telephone, radio, television and internet.</a:t>
             </a:r>
             <a:endParaRPr lang="en-US" sz="4000" dirty="0"/>
           </a:p>
@@ -13995,7 +14243,7 @@
                 <a:ea typeface="Calibri" pitchFamily="34" charset="-122"/>
                 <a:cs typeface="Calibri" pitchFamily="34" charset="-120"/>
               </a:rPr>
-              <a:t>FORMATIVE EVALUATION</a:t>
+              <a:t>BOARD SUMMARY</a:t>
             </a:r>
             <a:endParaRPr lang="en-US" sz="1400" dirty="0"/>
           </a:p>
@@ -14060,7 +14308,7 @@
                 <a:ea typeface="Times New Roman" pitchFamily="34" charset="-122"/>
                 <a:cs typeface="Times New Roman" pitchFamily="34" charset="-120"/>
               </a:rPr>
-              <a:t>Expected Answer</a:t>
+              <a:t>Examples of Tertiary Activities (continued)</a:t>
             </a:r>
             <a:endParaRPr lang="en-US" sz="3600" dirty="0"/>
           </a:p>
@@ -14087,14 +14335,15 @@
           <a:bodyPr wrap="square" lIns="0" tIns="0" rIns="0" bIns="0" rtlCol="0" anchor="t"/>
           <a:lstStyle/>
           <a:p>
-            <a:pPr algn="l" indent="0" marL="0">
+            <a:pPr algn="l" marL="342900" indent="-342900">
               <a:spcAft>
                 <a:spcPts val="800"/>
               </a:spcAft>
-              <a:buNone/>
+              <a:buSzPct val="100000"/>
+              <a:buChar char="•"/>
             </a:pPr>
             <a:r>
-              <a:rPr lang="en-US" sz="4000" dirty="0">
+              <a:rPr lang="en-US" sz="4000" b="1" dirty="0">
                 <a:solidFill>
                   <a:srgbClr val="111111"/>
                 </a:solidFill>
@@ -14102,7 +14351,25 @@
                 <a:ea typeface="Times New Roman" pitchFamily="34" charset="-122"/>
                 <a:cs typeface="Times New Roman" pitchFamily="34" charset="-120"/>
               </a:rPr>
-              <a:t>The sector that gives services.</a:t>
+              <a:t>Tourism: </a:t>
+            </a:r>
+            <a:pPr algn="l" marL="342900" indent="-342900">
+              <a:spcAft>
+                <a:spcPts val="800"/>
+              </a:spcAft>
+              <a:buSzPct val="100000"/>
+              <a:buChar char="•"/>
+            </a:pPr>
+            <a:r>
+              <a:rPr lang="en-US" sz="4000" dirty="0">
+                <a:solidFill>
+                  <a:srgbClr val="111111"/>
+                </a:solidFill>
+                <a:latin typeface="Times New Roman" pitchFamily="34" charset="0"/>
+                <a:ea typeface="Times New Roman" pitchFamily="34" charset="-122"/>
+                <a:cs typeface="Times New Roman" pitchFamily="34" charset="-120"/>
+              </a:rPr>
+              <a:t>Visits to parks such as Waza and Bénoué.</a:t>
             </a:r>
             <a:endParaRPr lang="en-US" sz="4000" dirty="0"/>
           </a:p>
@@ -14279,7 +14546,7 @@
                 <a:ea typeface="Times New Roman" pitchFamily="34" charset="-122"/>
                 <a:cs typeface="Times New Roman" pitchFamily="34" charset="-120"/>
               </a:rPr>
-              <a:t>Evaluation 2</a:t>
+              <a:t>Evaluation 1</a:t>
             </a:r>
             <a:endParaRPr lang="en-US" sz="3600" dirty="0"/>
           </a:p>
@@ -14321,7 +14588,7 @@
                 <a:ea typeface="Times New Roman" pitchFamily="34" charset="-122"/>
                 <a:cs typeface="Times New Roman" pitchFamily="34" charset="-120"/>
               </a:rPr>
-              <a:t>Give three examples of services.</a:t>
+              <a:t>What is the tertiary sector?</a:t>
             </a:r>
             <a:endParaRPr lang="en-US" sz="4000" dirty="0"/>
           </a:p>
@@ -14779,7 +15046,7 @@
                 <a:ea typeface="Times New Roman" pitchFamily="34" charset="-122"/>
                 <a:cs typeface="Times New Roman" pitchFamily="34" charset="-120"/>
               </a:rPr>
-              <a:t>Trade, transport and education (also banking, health, tourism).</a:t>
+              <a:t>The sector that gives services.</a:t>
             </a:r>
             <a:endParaRPr lang="en-US" sz="4000" dirty="0"/>
           </a:p>
@@ -14891,7 +15158,7 @@
                 <a:ea typeface="Calibri" pitchFamily="34" charset="-122"/>
                 <a:cs typeface="Calibri" pitchFamily="34" charset="-120"/>
               </a:rPr>
-              <a:t>REMEDIATION</a:t>
+              <a:t>FORMATIVE EVALUATION</a:t>
             </a:r>
             <a:endParaRPr lang="en-US" sz="1400" dirty="0"/>
           </a:p>
@@ -14914,7 +15181,7 @@
         <p:spPr>
           <a:xfrm>
             <a:off x="0" y="658368"/>
-            <a:ext cx="2468880" cy="5833872"/>
+            <a:ext cx="5120640" cy="5833872"/>
           </a:xfrm>
           <a:prstGeom prst="rect">
             <a:avLst/>
@@ -14929,8 +15196,8 @@
         </p:nvSpPr>
         <p:spPr>
           <a:xfrm>
-            <a:off x="2697480" y="1005840"/>
-            <a:ext cx="9174175" cy="731520"/>
+            <a:off x="5349240" y="1005840"/>
+            <a:ext cx="6522415" cy="731520"/>
           </a:xfrm>
           <a:prstGeom prst="rect">
             <a:avLst/>
@@ -14956,7 +15223,7 @@
                 <a:ea typeface="Times New Roman" pitchFamily="34" charset="-122"/>
                 <a:cs typeface="Times New Roman" pitchFamily="34" charset="-120"/>
               </a:rPr>
-              <a:t>Remediation</a:t>
+              <a:t>Evaluation 2</a:t>
             </a:r>
             <a:endParaRPr lang="en-US" sz="3600" dirty="0"/>
           </a:p>
@@ -14970,8 +15237,8 @@
         </p:nvSpPr>
         <p:spPr>
           <a:xfrm>
-            <a:off x="2697480" y="1783080"/>
-            <a:ext cx="9174175" cy="4663440"/>
+            <a:off x="5349240" y="1783080"/>
+            <a:ext cx="6522415" cy="4663440"/>
           </a:xfrm>
           <a:prstGeom prst="rect">
             <a:avLst/>
@@ -14990,7 +15257,7 @@
               <a:buNone/>
             </a:pPr>
             <a:r>
-              <a:rPr lang="en-US" sz="4000" b="1" dirty="0">
+              <a:rPr lang="en-US" sz="4000" dirty="0">
                 <a:solidFill>
                   <a:srgbClr val="111111"/>
                 </a:solidFill>
@@ -14998,73 +15265,7 @@
                 <a:ea typeface="Times New Roman" pitchFamily="34" charset="-122"/>
                 <a:cs typeface="Times New Roman" pitchFamily="34" charset="-120"/>
               </a:rPr>
-              <a:t>Fill in the blanks:</a:t>
-            </a:r>
-            <a:endParaRPr lang="en-US" sz="4000" dirty="0"/>
-          </a:p>
-          <a:p>
-            <a:pPr algn="l" marL="342900" indent="-342900">
-              <a:spcAft>
-                <a:spcPts val="800"/>
-              </a:spcAft>
-              <a:buSzPct val="100000"/>
-              <a:buFont typeface="+mj-lt"/>
-              <a:buAutoNum type="arabicPeriod" startAt="1"/>
-            </a:pPr>
-            <a:r>
-              <a:rPr lang="en-US" sz="4000" dirty="0">
-                <a:solidFill>
-                  <a:srgbClr val="111111"/>
-                </a:solidFill>
-                <a:latin typeface="Times New Roman" pitchFamily="34" charset="0"/>
-                <a:ea typeface="Times New Roman" pitchFamily="34" charset="-122"/>
-                <a:cs typeface="Times New Roman" pitchFamily="34" charset="-120"/>
-              </a:rPr>
-              <a:t>The sector that gives services is the ______ sector.</a:t>
-            </a:r>
-            <a:endParaRPr lang="en-US" sz="4000" dirty="0"/>
-          </a:p>
-          <a:p>
-            <a:pPr algn="l" marL="342900" indent="-342900">
-              <a:spcAft>
-                <a:spcPts val="800"/>
-              </a:spcAft>
-              <a:buSzPct val="100000"/>
-              <a:buFont typeface="+mj-lt"/>
-              <a:buAutoNum type="arabicPeriod" startAt="1"/>
-            </a:pPr>
-            <a:r>
-              <a:rPr lang="en-US" sz="4000" dirty="0">
-                <a:solidFill>
-                  <a:srgbClr val="111111"/>
-                </a:solidFill>
-                <a:latin typeface="Times New Roman" pitchFamily="34" charset="0"/>
-                <a:ea typeface="Times New Roman" pitchFamily="34" charset="-122"/>
-                <a:cs typeface="Times New Roman" pitchFamily="34" charset="-120"/>
-              </a:rPr>
-              <a:t>Buying and selling goods is called ______.</a:t>
-            </a:r>
-            <a:endParaRPr lang="en-US" sz="4000" dirty="0"/>
-          </a:p>
-          <a:p>
-            <a:pPr algn="l" marL="342900" indent="-342900">
-              <a:spcAft>
-                <a:spcPts val="800"/>
-              </a:spcAft>
-              <a:buSzPct val="100000"/>
-              <a:buFont typeface="+mj-lt"/>
-              <a:buAutoNum type="arabicPeriod" startAt="1"/>
-            </a:pPr>
-            <a:r>
-              <a:rPr lang="en-US" sz="4000" dirty="0">
-                <a:solidFill>
-                  <a:srgbClr val="111111"/>
-                </a:solidFill>
-                <a:latin typeface="Times New Roman" pitchFamily="34" charset="0"/>
-                <a:ea typeface="Times New Roman" pitchFamily="34" charset="-122"/>
-                <a:cs typeface="Times New Roman" pitchFamily="34" charset="-120"/>
-              </a:rPr>
-              <a:t>Visiting parks for pleasure is ______.</a:t>
+              <a:t>Give three examples of services.</a:t>
             </a:r>
             <a:endParaRPr lang="en-US" sz="4000" dirty="0"/>
           </a:p>
@@ -15176,7 +15377,7 @@
                 <a:ea typeface="Calibri" pitchFamily="34" charset="-122"/>
                 <a:cs typeface="Calibri" pitchFamily="34" charset="-120"/>
               </a:rPr>
-              <a:t>HOMEWORK</a:t>
+              <a:t>FORMATIVE EVALUATION</a:t>
             </a:r>
             <a:endParaRPr lang="en-US" sz="1400" dirty="0"/>
           </a:p>
@@ -15241,7 +15442,7 @@
                 <a:ea typeface="Times New Roman" pitchFamily="34" charset="-122"/>
                 <a:cs typeface="Times New Roman" pitchFamily="34" charset="-120"/>
               </a:rPr>
-              <a:t>Homework</a:t>
+              <a:t>Expected Answer</a:t>
             </a:r>
             <a:endParaRPr lang="en-US" sz="3600" dirty="0"/>
           </a:p>
@@ -15283,7 +15484,7 @@
                 <a:ea typeface="Times New Roman" pitchFamily="34" charset="-122"/>
                 <a:cs typeface="Times New Roman" pitchFamily="34" charset="-120"/>
               </a:rPr>
-              <a:t>Find out what a research centre does. Ask an adult or read about IRAD (Institute of Agricultural Research for Development).</a:t>
+              <a:t>Trade, transport and education (also banking, health, tourism).</a:t>
             </a:r>
             <a:endParaRPr lang="en-US" sz="4000" dirty="0"/>
           </a:p>
@@ -15395,7 +15596,7 @@
                 <a:ea typeface="Calibri" pitchFamily="34" charset="-122"/>
                 <a:cs typeface="Calibri" pitchFamily="34" charset="-120"/>
               </a:rPr>
-              <a:t>NEXT LESSON</a:t>
+              <a:t>REMEDIATION</a:t>
             </a:r>
             <a:endParaRPr lang="en-US" sz="1400" dirty="0"/>
           </a:p>
@@ -15418,7 +15619,7 @@
         <p:spPr>
           <a:xfrm>
             <a:off x="0" y="658368"/>
-            <a:ext cx="5120640" cy="5833872"/>
+            <a:ext cx="2468880" cy="5833872"/>
           </a:xfrm>
           <a:prstGeom prst="rect">
             <a:avLst/>
@@ -15433,8 +15634,8 @@
         </p:nvSpPr>
         <p:spPr>
           <a:xfrm>
-            <a:off x="5349240" y="1005840"/>
-            <a:ext cx="6522415" cy="731520"/>
+            <a:off x="2697480" y="1005840"/>
+            <a:ext cx="9174175" cy="731520"/>
           </a:xfrm>
           <a:prstGeom prst="rect">
             <a:avLst/>
@@ -15460,7 +15661,7 @@
                 <a:ea typeface="Times New Roman" pitchFamily="34" charset="-122"/>
                 <a:cs typeface="Times New Roman" pitchFamily="34" charset="-120"/>
               </a:rPr>
-              <a:t>Next Lesson</a:t>
+              <a:t>Remediation</a:t>
             </a:r>
             <a:endParaRPr lang="en-US" sz="3600" dirty="0"/>
           </a:p>
@@ -15474,8 +15675,8 @@
         </p:nvSpPr>
         <p:spPr>
           <a:xfrm>
-            <a:off x="5349240" y="1783080"/>
-            <a:ext cx="6522415" cy="4663440"/>
+            <a:off x="2697480" y="1783080"/>
+            <a:ext cx="9174175" cy="4663440"/>
           </a:xfrm>
           <a:prstGeom prst="rect">
             <a:avLst/>
@@ -15484,10 +15685,10 @@
           <a:ln/>
         </p:spPr>
         <p:txBody>
-          <a:bodyPr wrap="square" lIns="0" tIns="0" rIns="0" bIns="0" rtlCol="0" anchor="ctr"/>
-          <a:lstStyle/>
-          <a:p>
-            <a:pPr algn="ctr" indent="0" marL="0">
+          <a:bodyPr wrap="square" lIns="0" tIns="0" rIns="0" bIns="0" rtlCol="0" anchor="t"/>
+          <a:lstStyle/>
+          <a:p>
+            <a:pPr algn="l" indent="0" marL="0">
               <a:spcAft>
                 <a:spcPts val="800"/>
               </a:spcAft>
@@ -15502,27 +15703,73 @@
                 <a:ea typeface="Times New Roman" pitchFamily="34" charset="-122"/>
                 <a:cs typeface="Times New Roman" pitchFamily="34" charset="-120"/>
               </a:rPr>
-              <a:t>Our next lesson will be on:</a:t>
+              <a:t>Fill in the blanks:</a:t>
             </a:r>
             <a:endParaRPr lang="en-US" sz="4000" dirty="0"/>
           </a:p>
           <a:p>
-            <a:pPr algn="ctr" indent="0" marL="0">
+            <a:pPr algn="l" marL="342900" indent="-342900">
               <a:spcAft>
                 <a:spcPts val="800"/>
               </a:spcAft>
-              <a:buNone/>
+              <a:buSzPct val="100000"/>
+              <a:buFont typeface="+mj-lt"/>
+              <a:buAutoNum type="arabicPeriod" startAt="1"/>
             </a:pPr>
             <a:r>
-              <a:rPr lang="en-US" sz="4000" b="1" dirty="0">
-                <a:solidFill>
-                  <a:srgbClr val="990011"/>
+              <a:rPr lang="en-US" sz="4000" dirty="0">
+                <a:solidFill>
+                  <a:srgbClr val="111111"/>
                 </a:solidFill>
                 <a:latin typeface="Times New Roman" pitchFamily="34" charset="0"/>
                 <a:ea typeface="Times New Roman" pitchFamily="34" charset="-122"/>
                 <a:cs typeface="Times New Roman" pitchFamily="34" charset="-120"/>
               </a:rPr>
-              <a:t>Lesson 5 (Part 6): The Sectors of the Economy: The Quaternary Sector (Definition and Examples)</a:t>
+              <a:t>The sector that gives services is the ______ sector.</a:t>
+            </a:r>
+            <a:endParaRPr lang="en-US" sz="4000" dirty="0"/>
+          </a:p>
+          <a:p>
+            <a:pPr algn="l" marL="342900" indent="-342900">
+              <a:spcAft>
+                <a:spcPts val="800"/>
+              </a:spcAft>
+              <a:buSzPct val="100000"/>
+              <a:buFont typeface="+mj-lt"/>
+              <a:buAutoNum type="arabicPeriod" startAt="1"/>
+            </a:pPr>
+            <a:r>
+              <a:rPr lang="en-US" sz="4000" dirty="0">
+                <a:solidFill>
+                  <a:srgbClr val="111111"/>
+                </a:solidFill>
+                <a:latin typeface="Times New Roman" pitchFamily="34" charset="0"/>
+                <a:ea typeface="Times New Roman" pitchFamily="34" charset="-122"/>
+                <a:cs typeface="Times New Roman" pitchFamily="34" charset="-120"/>
+              </a:rPr>
+              <a:t>Buying and selling goods is called ______.</a:t>
+            </a:r>
+            <a:endParaRPr lang="en-US" sz="4000" dirty="0"/>
+          </a:p>
+          <a:p>
+            <a:pPr algn="l" marL="342900" indent="-342900">
+              <a:spcAft>
+                <a:spcPts val="800"/>
+              </a:spcAft>
+              <a:buSzPct val="100000"/>
+              <a:buFont typeface="+mj-lt"/>
+              <a:buAutoNum type="arabicPeriod" startAt="1"/>
+            </a:pPr>
+            <a:r>
+              <a:rPr lang="en-US" sz="4000" dirty="0">
+                <a:solidFill>
+                  <a:srgbClr val="111111"/>
+                </a:solidFill>
+                <a:latin typeface="Times New Roman" pitchFamily="34" charset="0"/>
+                <a:ea typeface="Times New Roman" pitchFamily="34" charset="-122"/>
+                <a:cs typeface="Times New Roman" pitchFamily="34" charset="-120"/>
+              </a:rPr>
+              <a:t>Visiting parks for pleasure is ______.</a:t>
             </a:r>
             <a:endParaRPr lang="en-US" sz="4000" dirty="0"/>
           </a:p>
@@ -15634,6 +15881,464 @@
                 <a:ea typeface="Calibri" pitchFamily="34" charset="-122"/>
                 <a:cs typeface="Calibri" pitchFamily="34" charset="-120"/>
               </a:rPr>
+              <a:t>HOMEWORK</a:t>
+            </a:r>
+            <a:endParaRPr lang="en-US" sz="1400" dirty="0"/>
+          </a:p>
+        </p:txBody>
+      </p:sp>
+      <p:pic>
+        <p:nvPicPr>
+          <p:cNvPr id="3" name="Image 0" descr="/home/claude/f4/img/minesec_sheet.png">    </p:cNvPr>
+          <p:cNvPicPr>
+            <a:picLocks noChangeAspect="1"/>
+          </p:cNvPicPr>
+          <p:nvPr/>
+        </p:nvPicPr>
+        <p:blipFill>
+          <a:blip r:embed="rId1"/>
+          <a:stretch>
+            <a:fillRect/>
+          </a:stretch>
+        </p:blipFill>
+        <p:spPr>
+          <a:xfrm>
+            <a:off x="0" y="658368"/>
+            <a:ext cx="5120640" cy="5833872"/>
+          </a:xfrm>
+          <a:prstGeom prst="rect">
+            <a:avLst/>
+          </a:prstGeom>
+        </p:spPr>
+      </p:pic>
+      <p:sp>
+        <p:nvSpPr>
+          <p:cNvPr id="4" name="Text 1"/>
+          <p:cNvSpPr/>
+          <p:nvPr/>
+        </p:nvSpPr>
+        <p:spPr>
+          <a:xfrm>
+            <a:off x="5349240" y="1005840"/>
+            <a:ext cx="6522415" cy="731520"/>
+          </a:xfrm>
+          <a:prstGeom prst="rect">
+            <a:avLst/>
+          </a:prstGeom>
+          <a:noFill/>
+          <a:ln/>
+        </p:spPr>
+        <p:txBody>
+          <a:bodyPr wrap="square" lIns="0" tIns="0" rIns="0" bIns="0" rtlCol="0" anchor="ctr">
+            <a:normAutofit/>
+          </a:bodyPr>
+          <a:lstStyle/>
+          <a:p>
+            <a:pPr algn="ctr" indent="0" marL="0">
+              <a:buNone/>
+            </a:pPr>
+            <a:r>
+              <a:rPr lang="en-US" sz="3600" b="1" dirty="0">
+                <a:solidFill>
+                  <a:srgbClr val="990011"/>
+                </a:solidFill>
+                <a:latin typeface="Times New Roman" pitchFamily="34" charset="0"/>
+                <a:ea typeface="Times New Roman" pitchFamily="34" charset="-122"/>
+                <a:cs typeface="Times New Roman" pitchFamily="34" charset="-120"/>
+              </a:rPr>
+              <a:t>Homework</a:t>
+            </a:r>
+            <a:endParaRPr lang="en-US" sz="3600" dirty="0"/>
+          </a:p>
+        </p:txBody>
+      </p:sp>
+      <p:sp>
+        <p:nvSpPr>
+          <p:cNvPr id="5" name="Text 2"/>
+          <p:cNvSpPr/>
+          <p:nvPr/>
+        </p:nvSpPr>
+        <p:spPr>
+          <a:xfrm>
+            <a:off x="5349240" y="1783080"/>
+            <a:ext cx="6522415" cy="4663440"/>
+          </a:xfrm>
+          <a:prstGeom prst="rect">
+            <a:avLst/>
+          </a:prstGeom>
+          <a:noFill/>
+          <a:ln/>
+        </p:spPr>
+        <p:txBody>
+          <a:bodyPr wrap="square" lIns="0" tIns="0" rIns="0" bIns="0" rtlCol="0" anchor="t"/>
+          <a:lstStyle/>
+          <a:p>
+            <a:pPr algn="l" indent="0" marL="0">
+              <a:spcAft>
+                <a:spcPts val="800"/>
+              </a:spcAft>
+              <a:buNone/>
+            </a:pPr>
+            <a:r>
+              <a:rPr lang="en-US" sz="4000" dirty="0">
+                <a:solidFill>
+                  <a:srgbClr val="111111"/>
+                </a:solidFill>
+                <a:latin typeface="Times New Roman" pitchFamily="34" charset="0"/>
+                <a:ea typeface="Times New Roman" pitchFamily="34" charset="-122"/>
+                <a:cs typeface="Times New Roman" pitchFamily="34" charset="-120"/>
+              </a:rPr>
+              <a:t>Find out what a research centre does. Ask an adult or read about IRAD (Institute of Agricultural Research for Development).</a:t>
+            </a:r>
+            <a:endParaRPr lang="en-US" sz="4000" dirty="0"/>
+          </a:p>
+        </p:txBody>
+      </p:sp>
+      <p:sp>
+        <p:nvSpPr>
+          <p:cNvPr id="25" name="Slide Number Placeholder 0"/>
+          <p:cNvSpPr>
+            <a:spLocks noGrp="1"/>
+          </p:cNvSpPr>
+          <p:nvPr>
+            <p:ph type="sldNum" sz="quarter" idx="4294967295"/>
+          </p:nvPr>
+        </p:nvSpPr>
+        <p:spPr>
+          <a:xfrm>
+            <a:off x="27432" y="91440"/>
+            <a:ext cx="585216" cy="475488"/>
+          </a:xfrm>
+          <a:prstGeom prst="rect">
+            <a:avLst/>
+          </a:prstGeom>
+          <a:extLst>
+            <a:ext uri="{C572A759-6A51-4108-AA02-DFA0A04FC94B}">
+              <ma14:wrappingTextBoxFlag xmlns:ma14="http://schemas.microsoft.com/office/mac/drawingml/2011/main" val="0"/>
+            </a:ext>
+          </a:extLst>
+        </p:spPr>
+        <p:txBody>
+          <a:bodyPr/>
+          <a:lstStyle>
+            <a:lvl1pPr>
+              <a:defRPr sz="2000">
+                <a:solidFill>
+                  <a:srgbClr val="FFFFFF"/>
+                </a:solidFill>
+                <a:latin typeface="Calibri"/>
+                <a:ea typeface="Calibri"/>
+                <a:cs typeface="Calibri"/>
+              </a:defRPr>
+            </a:lvl1pPr>
+          </a:lstStyle>
+          <a:p>
+            <a:pPr algn="ctr"/>
+            <a:fld id="{F7021451-1387-4CA6-816F-3879F97B5CBC}" type="slidenum">
+              <a:rPr b="1" lang="en-US"/>
+              <a:t>44</a:t>
+            </a:fld>
+            <a:endParaRPr lang="en-US"/>
+          </a:p>
+        </p:txBody>
+      </p:sp>
+    </p:spTree>
+  </p:cSld>
+  <p:clrMapOvr>
+    <a:masterClrMapping/>
+  </p:clrMapOvr>
+</p:sld>
+</file>
+
+<file path=ppt/slides/slide45.xml><?xml version="1.0" encoding="utf-8"?>
+<p:sld xmlns:a="http://schemas.openxmlformats.org/drawingml/2006/main" xmlns:r="http://schemas.openxmlformats.org/officeDocument/2006/relationships" xmlns:p="http://schemas.openxmlformats.org/presentationml/2006/main">
+  <p:cSld name="Slide 45">
+    <p:spTree>
+      <p:nvGrpSpPr>
+        <p:cNvPr id="1" name=""/>
+        <p:cNvGrpSpPr/>
+        <p:nvPr/>
+      </p:nvGrpSpPr>
+      <p:grpSpPr>
+        <a:xfrm>
+          <a:off x="0" y="0"/>
+          <a:ext cx="0" cy="0"/>
+          <a:chOff x="0" y="0"/>
+          <a:chExt cx="0" cy="0"/>
+        </a:xfrm>
+      </p:grpSpPr>
+      <p:sp>
+        <p:nvSpPr>
+          <p:cNvPr id="2" name="Text 0"/>
+          <p:cNvSpPr/>
+          <p:nvPr/>
+        </p:nvSpPr>
+        <p:spPr>
+          <a:xfrm>
+            <a:off x="457200" y="713232"/>
+            <a:ext cx="11368735" cy="274320"/>
+          </a:xfrm>
+          <a:prstGeom prst="rect">
+            <a:avLst/>
+          </a:prstGeom>
+          <a:noFill/>
+          <a:ln/>
+        </p:spPr>
+        <p:txBody>
+          <a:bodyPr wrap="square" lIns="0" tIns="0" rIns="0" bIns="0" rtlCol="0" anchor="ctr"/>
+          <a:lstStyle/>
+          <a:p>
+            <a:pPr algn="r" indent="0" marL="0">
+              <a:buNone/>
+            </a:pPr>
+            <a:r>
+              <a:rPr lang="en-US" sz="1400" b="1" dirty="0">
+                <a:solidFill>
+                  <a:srgbClr val="1C3F6E"/>
+                </a:solidFill>
+                <a:latin typeface="Calibri" pitchFamily="34" charset="0"/>
+                <a:ea typeface="Calibri" pitchFamily="34" charset="-122"/>
+                <a:cs typeface="Calibri" pitchFamily="34" charset="-120"/>
+              </a:rPr>
+              <a:t>NEXT LESSON</a:t>
+            </a:r>
+            <a:endParaRPr lang="en-US" sz="1400" dirty="0"/>
+          </a:p>
+        </p:txBody>
+      </p:sp>
+      <p:pic>
+        <p:nvPicPr>
+          <p:cNvPr id="3" name="Image 0" descr="/home/claude/f4/img/minesec_sheet.png">    </p:cNvPr>
+          <p:cNvPicPr>
+            <a:picLocks noChangeAspect="1"/>
+          </p:cNvPicPr>
+          <p:nvPr/>
+        </p:nvPicPr>
+        <p:blipFill>
+          <a:blip r:embed="rId1"/>
+          <a:stretch>
+            <a:fillRect/>
+          </a:stretch>
+        </p:blipFill>
+        <p:spPr>
+          <a:xfrm>
+            <a:off x="0" y="658368"/>
+            <a:ext cx="5120640" cy="5833872"/>
+          </a:xfrm>
+          <a:prstGeom prst="rect">
+            <a:avLst/>
+          </a:prstGeom>
+        </p:spPr>
+      </p:pic>
+      <p:sp>
+        <p:nvSpPr>
+          <p:cNvPr id="4" name="Text 1"/>
+          <p:cNvSpPr/>
+          <p:nvPr/>
+        </p:nvSpPr>
+        <p:spPr>
+          <a:xfrm>
+            <a:off x="5349240" y="1005840"/>
+            <a:ext cx="6522415" cy="731520"/>
+          </a:xfrm>
+          <a:prstGeom prst="rect">
+            <a:avLst/>
+          </a:prstGeom>
+          <a:noFill/>
+          <a:ln/>
+        </p:spPr>
+        <p:txBody>
+          <a:bodyPr wrap="square" lIns="0" tIns="0" rIns="0" bIns="0" rtlCol="0" anchor="ctr">
+            <a:normAutofit/>
+          </a:bodyPr>
+          <a:lstStyle/>
+          <a:p>
+            <a:pPr algn="ctr" indent="0" marL="0">
+              <a:buNone/>
+            </a:pPr>
+            <a:r>
+              <a:rPr lang="en-US" sz="3600" b="1" dirty="0">
+                <a:solidFill>
+                  <a:srgbClr val="990011"/>
+                </a:solidFill>
+                <a:latin typeface="Times New Roman" pitchFamily="34" charset="0"/>
+                <a:ea typeface="Times New Roman" pitchFamily="34" charset="-122"/>
+                <a:cs typeface="Times New Roman" pitchFamily="34" charset="-120"/>
+              </a:rPr>
+              <a:t>Next Lesson</a:t>
+            </a:r>
+            <a:endParaRPr lang="en-US" sz="3600" dirty="0"/>
+          </a:p>
+        </p:txBody>
+      </p:sp>
+      <p:sp>
+        <p:nvSpPr>
+          <p:cNvPr id="5" name="Text 2"/>
+          <p:cNvSpPr/>
+          <p:nvPr/>
+        </p:nvSpPr>
+        <p:spPr>
+          <a:xfrm>
+            <a:off x="5349240" y="1783080"/>
+            <a:ext cx="6522415" cy="4663440"/>
+          </a:xfrm>
+          <a:prstGeom prst="rect">
+            <a:avLst/>
+          </a:prstGeom>
+          <a:noFill/>
+          <a:ln/>
+        </p:spPr>
+        <p:txBody>
+          <a:bodyPr wrap="square" lIns="0" tIns="0" rIns="0" bIns="0" rtlCol="0" anchor="ctr"/>
+          <a:lstStyle/>
+          <a:p>
+            <a:pPr algn="ctr" indent="0" marL="0">
+              <a:spcAft>
+                <a:spcPts val="800"/>
+              </a:spcAft>
+              <a:buNone/>
+            </a:pPr>
+            <a:r>
+              <a:rPr lang="en-US" sz="4000" b="1" dirty="0">
+                <a:solidFill>
+                  <a:srgbClr val="111111"/>
+                </a:solidFill>
+                <a:latin typeface="Times New Roman" pitchFamily="34" charset="0"/>
+                <a:ea typeface="Times New Roman" pitchFamily="34" charset="-122"/>
+                <a:cs typeface="Times New Roman" pitchFamily="34" charset="-120"/>
+              </a:rPr>
+              <a:t>Our next lesson will be on:</a:t>
+            </a:r>
+            <a:endParaRPr lang="en-US" sz="4000" dirty="0"/>
+          </a:p>
+          <a:p>
+            <a:pPr algn="ctr" indent="0" marL="0">
+              <a:spcAft>
+                <a:spcPts val="800"/>
+              </a:spcAft>
+              <a:buNone/>
+            </a:pPr>
+            <a:r>
+              <a:rPr lang="en-US" sz="4000" b="1" dirty="0">
+                <a:solidFill>
+                  <a:srgbClr val="990011"/>
+                </a:solidFill>
+                <a:latin typeface="Times New Roman" pitchFamily="34" charset="0"/>
+                <a:ea typeface="Times New Roman" pitchFamily="34" charset="-122"/>
+                <a:cs typeface="Times New Roman" pitchFamily="34" charset="-120"/>
+              </a:rPr>
+              <a:t>Lesson 5 (Part 6): The Sectors of the Economy: The Quaternary Sector (Definition and Examples)</a:t>
+            </a:r>
+            <a:endParaRPr lang="en-US" sz="4000" dirty="0"/>
+          </a:p>
+        </p:txBody>
+      </p:sp>
+      <p:sp>
+        <p:nvSpPr>
+          <p:cNvPr id="25" name="Slide Number Placeholder 0"/>
+          <p:cNvSpPr>
+            <a:spLocks noGrp="1"/>
+          </p:cNvSpPr>
+          <p:nvPr>
+            <p:ph type="sldNum" sz="quarter" idx="4294967295"/>
+          </p:nvPr>
+        </p:nvSpPr>
+        <p:spPr>
+          <a:xfrm>
+            <a:off x="27432" y="91440"/>
+            <a:ext cx="585216" cy="475488"/>
+          </a:xfrm>
+          <a:prstGeom prst="rect">
+            <a:avLst/>
+          </a:prstGeom>
+          <a:extLst>
+            <a:ext uri="{C572A759-6A51-4108-AA02-DFA0A04FC94B}">
+              <ma14:wrappingTextBoxFlag xmlns:ma14="http://schemas.microsoft.com/office/mac/drawingml/2011/main" val="0"/>
+            </a:ext>
+          </a:extLst>
+        </p:spPr>
+        <p:txBody>
+          <a:bodyPr/>
+          <a:lstStyle>
+            <a:lvl1pPr>
+              <a:defRPr sz="2000">
+                <a:solidFill>
+                  <a:srgbClr val="FFFFFF"/>
+                </a:solidFill>
+                <a:latin typeface="Calibri"/>
+                <a:ea typeface="Calibri"/>
+                <a:cs typeface="Calibri"/>
+              </a:defRPr>
+            </a:lvl1pPr>
+          </a:lstStyle>
+          <a:p>
+            <a:pPr algn="ctr"/>
+            <a:fld id="{F7021451-1387-4CA6-816F-3879F97B5CBC}" type="slidenum">
+              <a:rPr b="1" lang="en-US"/>
+              <a:t>45</a:t>
+            </a:fld>
+            <a:endParaRPr lang="en-US"/>
+          </a:p>
+        </p:txBody>
+      </p:sp>
+    </p:spTree>
+  </p:cSld>
+  <p:clrMapOvr>
+    <a:masterClrMapping/>
+  </p:clrMapOvr>
+</p:sld>
+</file>
+
+<file path=ppt/slides/slide46.xml><?xml version="1.0" encoding="utf-8"?>
+<p:sld xmlns:a="http://schemas.openxmlformats.org/drawingml/2006/main" xmlns:r="http://schemas.openxmlformats.org/officeDocument/2006/relationships" xmlns:p="http://schemas.openxmlformats.org/presentationml/2006/main">
+  <p:cSld name="Slide 46">
+    <p:spTree>
+      <p:nvGrpSpPr>
+        <p:cNvPr id="1" name=""/>
+        <p:cNvGrpSpPr/>
+        <p:nvPr/>
+      </p:nvGrpSpPr>
+      <p:grpSpPr>
+        <a:xfrm>
+          <a:off x="0" y="0"/>
+          <a:ext cx="0" cy="0"/>
+          <a:chOff x="0" y="0"/>
+          <a:chExt cx="0" cy="0"/>
+        </a:xfrm>
+      </p:grpSpPr>
+      <p:sp>
+        <p:nvSpPr>
+          <p:cNvPr id="2" name="Text 0"/>
+          <p:cNvSpPr/>
+          <p:nvPr/>
+        </p:nvSpPr>
+        <p:spPr>
+          <a:xfrm>
+            <a:off x="457200" y="713232"/>
+            <a:ext cx="11368735" cy="274320"/>
+          </a:xfrm>
+          <a:prstGeom prst="rect">
+            <a:avLst/>
+          </a:prstGeom>
+          <a:noFill/>
+          <a:ln/>
+        </p:spPr>
+        <p:txBody>
+          <a:bodyPr wrap="square" lIns="0" tIns="0" rIns="0" bIns="0" rtlCol="0" anchor="ctr"/>
+          <a:lstStyle/>
+          <a:p>
+            <a:pPr algn="r" indent="0" marL="0">
+              <a:buNone/>
+            </a:pPr>
+            <a:r>
+              <a:rPr lang="en-US" sz="1400" b="1" dirty="0">
+                <a:solidFill>
+                  <a:srgbClr val="1C3F6E"/>
+                </a:solidFill>
+                <a:latin typeface="Calibri" pitchFamily="34" charset="0"/>
+                <a:ea typeface="Calibri" pitchFamily="34" charset="-122"/>
+                <a:cs typeface="Calibri" pitchFamily="34" charset="-120"/>
+              </a:rPr>
               <a:t>BILINGUAL GAME</a:t>
             </a:r>
             <a:endParaRPr lang="en-US" sz="1400" dirty="0"/>
@@ -15681,7 +16386,7 @@
       </p:sp>
       <p:graphicFrame>
         <p:nvGraphicFramePr>
-          <p:cNvPr id="45" name="Table 0"/>
+          <p:cNvPr id="47" name="Table 0"/>
           <p:cNvGraphicFramePr>
             <a:graphicFrameLocks noGrp="1"/>
           </p:cNvGraphicFramePr>
@@ -16993,7 +17698,7 @@
             <a:pPr algn="ctr"/>
             <a:fld id="{F7021451-1387-4CA6-816F-3879F97B5CBC}" type="slidenum">
               <a:rPr b="1" lang="en-US"/>
-              <a:t>44</a:t>
+              <a:t>46</a:t>
             </a:fld>
             <a:endParaRPr lang="en-US"/>
           </a:p>
@@ -17007,9 +17712,9 @@
 </p:sld>
 </file>
 
-<file path=ppt/slides/slide45.xml><?xml version="1.0" encoding="utf-8"?>
+<file path=ppt/slides/slide47.xml><?xml version="1.0" encoding="utf-8"?>
 <p:sld xmlns:a="http://schemas.openxmlformats.org/drawingml/2006/main" xmlns:r="http://schemas.openxmlformats.org/officeDocument/2006/relationships" xmlns:p="http://schemas.openxmlformats.org/presentationml/2006/main">
-  <p:cSld name="Slide 45">
+  <p:cSld name="Slide 47">
     <p:spTree>
       <p:nvGrpSpPr>
         <p:cNvPr id="1" name=""/>
@@ -17104,7 +17809,7 @@
       </p:sp>
       <p:graphicFrame>
         <p:nvGraphicFramePr>
-          <p:cNvPr id="46" name="Table 0"/>
+          <p:cNvPr id="48" name="Table 0"/>
           <p:cNvGraphicFramePr>
             <a:graphicFrameLocks noGrp="1"/>
           </p:cNvGraphicFramePr>
@@ -17726,7 +18431,7 @@
             <a:pPr algn="ctr"/>
             <a:fld id="{F7021451-1387-4CA6-816F-3879F97B5CBC}" type="slidenum">
               <a:rPr b="1" lang="en-US"/>
-              <a:t>45</a:t>
+              <a:t>47</a:t>
             </a:fld>
             <a:endParaRPr lang="en-US"/>
           </a:p>
@@ -17740,9 +18445,9 @@
 </p:sld>
 </file>
 
-<file path=ppt/slides/slide46.xml><?xml version="1.0" encoding="utf-8"?>
+<file path=ppt/slides/slide48.xml><?xml version="1.0" encoding="utf-8"?>
 <p:sld xmlns:a="http://schemas.openxmlformats.org/drawingml/2006/main" xmlns:r="http://schemas.openxmlformats.org/officeDocument/2006/relationships" xmlns:p="http://schemas.openxmlformats.org/presentationml/2006/main">
-  <p:cSld name="Slide 46">
+  <p:cSld name="Slide 48">
     <p:spTree>
       <p:nvGrpSpPr>
         <p:cNvPr id="1" name=""/>
@@ -17837,7 +18542,7 @@
       </p:sp>
       <p:graphicFrame>
         <p:nvGraphicFramePr>
-          <p:cNvPr id="47" name="Table 0"/>
+          <p:cNvPr id="49" name="Table 0"/>
           <p:cNvGraphicFramePr>
             <a:graphicFrameLocks noGrp="1"/>
           </p:cNvGraphicFramePr>
@@ -17947,7 +18652,7 @@
                           <a:ea typeface="Calibri" pitchFamily="34" charset="-122"/>
                           <a:cs typeface="Calibri" pitchFamily="34" charset="-120"/>
                         </a:rPr>
-                        <a:t>DEFINITIONS; Examples of the Tertiary Sector.</a:t>
+                        <a:t>DEFINITIONS; Examples of Tertiary Activities.</a:t>
                       </a:r>
                       <a:endParaRPr lang="en-US" sz="1600" dirty="0">
                         <a:latin typeface="Calibri" charset="0"/>
@@ -18597,7 +19302,7 @@
             <a:pPr algn="ctr"/>
             <a:fld id="{F7021451-1387-4CA6-816F-3879F97B5CBC}" type="slidenum">
               <a:rPr b="1" lang="en-US"/>
-              <a:t>46</a:t>
+              <a:t>48</a:t>
             </a:fld>
             <a:endParaRPr lang="en-US"/>
           </a:p>
@@ -18611,9 +19316,9 @@
 </p:sld>
 </file>
 
-<file path=ppt/slides/slide47.xml><?xml version="1.0" encoding="utf-8"?>
+<file path=ppt/slides/slide49.xml><?xml version="1.0" encoding="utf-8"?>
 <p:sld xmlns:a="http://schemas.openxmlformats.org/drawingml/2006/main" xmlns:r="http://schemas.openxmlformats.org/officeDocument/2006/relationships" xmlns:p="http://schemas.openxmlformats.org/presentationml/2006/main">
-  <p:cSld name="Slide 47">
+  <p:cSld name="Slide 49">
     <p:spTree>
       <p:nvGrpSpPr>
         <p:cNvPr id="1" name=""/>
@@ -18684,7 +19389,7 @@
         <p:spPr>
           <a:xfrm>
             <a:off x="0" y="658368"/>
-            <a:ext cx="2468880" cy="5833872"/>
+            <a:ext cx="3840480" cy="5833872"/>
           </a:xfrm>
           <a:prstGeom prst="rect">
             <a:avLst/>
@@ -18699,8 +19404,8 @@
         </p:nvSpPr>
         <p:spPr>
           <a:xfrm>
-            <a:off x="2697480" y="1005840"/>
-            <a:ext cx="9174175" cy="731520"/>
+            <a:off x="4069080" y="1005840"/>
+            <a:ext cx="7802575" cy="731520"/>
           </a:xfrm>
           <a:prstGeom prst="rect">
             <a:avLst/>
@@ -18740,8 +19445,8 @@
         </p:nvSpPr>
         <p:spPr>
           <a:xfrm>
-            <a:off x="2697480" y="1783080"/>
-            <a:ext cx="9174175" cy="4663440"/>
+            <a:off x="4069080" y="1783080"/>
+            <a:ext cx="7802575" cy="4663440"/>
           </a:xfrm>
           <a:prstGeom prst="rect">
             <a:avLst/>
@@ -18790,7 +19495,7 @@
                 <a:ea typeface="Calibri" pitchFamily="34" charset="-122"/>
                 <a:cs typeface="Calibri" pitchFamily="34" charset="-120"/>
               </a:rPr>
-              <a:t>Without the projector (Activity 1): ask learners to describe the Garoua central market.</a:t>
+              <a:t>Without the projector (Activity 1): describe the market of Garoua.</a:t>
             </a:r>
             <a:endParaRPr lang="en-US" sz="2000" dirty="0"/>
           </a:p>
@@ -18811,7 +19516,7 @@
                 <a:ea typeface="Calibri" pitchFamily="34" charset="-122"/>
                 <a:cs typeface="Calibri" pitchFamily="34" charset="-120"/>
               </a:rPr>
-              <a:t>Without the projector (Activity 2): ask learners how they travel to Ngaoundéré or Yaoundé.</a:t>
+              <a:t>Without the projector (Activity 2): list means of transport.</a:t>
             </a:r>
             <a:endParaRPr lang="en-US" sz="2000" dirty="0"/>
           </a:p>
@@ -18832,7 +19537,7 @@
                 <a:ea typeface="Calibri" pitchFamily="34" charset="-122"/>
                 <a:cs typeface="Calibri" pitchFamily="34" charset="-120"/>
               </a:rPr>
-              <a:t>Without the projector (Activity 3): ask learners who uses mobile money in their family.</a:t>
+              <a:t>Without the projector (Activity 3): ask who uses mobile money.</a:t>
             </a:r>
             <a:endParaRPr lang="en-US" sz="2000" dirty="0"/>
           </a:p>
@@ -18853,7 +19558,7 @@
                 <a:ea typeface="Calibri" pitchFamily="34" charset="-122"/>
                 <a:cs typeface="Calibri" pitchFamily="34" charset="-120"/>
               </a:rPr>
-              <a:t>Without the projector (Activity 4): use the class itself as the example.</a:t>
+              <a:t>Without the projector (Activity 4): name public services.</a:t>
             </a:r>
             <a:endParaRPr lang="en-US" sz="2000" dirty="0"/>
           </a:p>
@@ -18874,7 +19579,7 @@
                 <a:ea typeface="Calibri" pitchFamily="34" charset="-122"/>
                 <a:cs typeface="Calibri" pitchFamily="34" charset="-120"/>
               </a:rPr>
-              <a:t>Without the projector (Activity 5): ask learners to name the national parks of the North.</a:t>
+              <a:t>Without the projector (Activity 5): name parks.</a:t>
             </a:r>
             <a:endParaRPr lang="en-US" sz="2000" dirty="0"/>
           </a:p>
@@ -18922,353 +19627,7 @@
             <a:pPr algn="ctr"/>
             <a:fld id="{F7021451-1387-4CA6-816F-3879F97B5CBC}" type="slidenum">
               <a:rPr b="1" lang="en-US"/>
-              <a:t>47</a:t>
-            </a:fld>
-            <a:endParaRPr lang="en-US"/>
-          </a:p>
-        </p:txBody>
-      </p:sp>
-    </p:spTree>
-  </p:cSld>
-  <p:clrMapOvr>
-    <a:masterClrMapping/>
-  </p:clrMapOvr>
-</p:sld>
-</file>
-
-<file path=ppt/slides/slide48.xml><?xml version="1.0" encoding="utf-8"?>
-<p:sld xmlns:a="http://schemas.openxmlformats.org/drawingml/2006/main" xmlns:r="http://schemas.openxmlformats.org/officeDocument/2006/relationships" xmlns:p="http://schemas.openxmlformats.org/presentationml/2006/main">
-  <p:cSld name="Slide 48">
-    <p:spTree>
-      <p:nvGrpSpPr>
-        <p:cNvPr id="1" name=""/>
-        <p:cNvGrpSpPr/>
-        <p:nvPr/>
-      </p:nvGrpSpPr>
-      <p:grpSpPr>
-        <a:xfrm>
-          <a:off x="0" y="0"/>
-          <a:ext cx="0" cy="0"/>
-          <a:chOff x="0" y="0"/>
-          <a:chExt cx="0" cy="0"/>
-        </a:xfrm>
-      </p:grpSpPr>
-      <p:sp>
-        <p:nvSpPr>
-          <p:cNvPr id="2" name="Text 0"/>
-          <p:cNvSpPr/>
-          <p:nvPr/>
-        </p:nvSpPr>
-        <p:spPr>
-          <a:xfrm>
-            <a:off x="457200" y="713232"/>
-            <a:ext cx="11368735" cy="274320"/>
-          </a:xfrm>
-          <a:prstGeom prst="rect">
-            <a:avLst/>
-          </a:prstGeom>
-          <a:noFill/>
-          <a:ln/>
-        </p:spPr>
-        <p:txBody>
-          <a:bodyPr wrap="square" lIns="0" tIns="0" rIns="0" bIns="0" rtlCol="0" anchor="ctr"/>
-          <a:lstStyle/>
-          <a:p>
-            <a:pPr algn="r" indent="0" marL="0">
-              <a:buNone/>
-            </a:pPr>
-            <a:r>
-              <a:rPr lang="en-US" sz="1400" b="1" dirty="0">
-                <a:solidFill>
-                  <a:srgbClr val="1C3F6E"/>
-                </a:solidFill>
-                <a:latin typeface="Calibri" pitchFamily="34" charset="0"/>
-                <a:ea typeface="Calibri" pitchFamily="34" charset="-122"/>
-                <a:cs typeface="Calibri" pitchFamily="34" charset="-120"/>
-              </a:rPr>
-              <a:t>REFERENCES</a:t>
-            </a:r>
-            <a:endParaRPr lang="en-US" sz="1400" dirty="0"/>
-          </a:p>
-        </p:txBody>
-      </p:sp>
-      <p:pic>
-        <p:nvPicPr>
-          <p:cNvPr id="3" name="Image 0" descr="/home/claude/f4/img/minesec_sheet.png">    </p:cNvPr>
-          <p:cNvPicPr>
-            <a:picLocks noChangeAspect="1"/>
-          </p:cNvPicPr>
-          <p:nvPr/>
-        </p:nvPicPr>
-        <p:blipFill>
-          <a:blip r:embed="rId1"/>
-          <a:stretch>
-            <a:fillRect/>
-          </a:stretch>
-        </p:blipFill>
-        <p:spPr>
-          <a:xfrm>
-            <a:off x="0" y="658368"/>
-            <a:ext cx="2468880" cy="5833872"/>
-          </a:xfrm>
-          <a:prstGeom prst="rect">
-            <a:avLst/>
-          </a:prstGeom>
-        </p:spPr>
-      </p:pic>
-      <p:sp>
-        <p:nvSpPr>
-          <p:cNvPr id="4" name="Text 1"/>
-          <p:cNvSpPr/>
-          <p:nvPr/>
-        </p:nvSpPr>
-        <p:spPr>
-          <a:xfrm>
-            <a:off x="2697480" y="1005840"/>
-            <a:ext cx="9174175" cy="731520"/>
-          </a:xfrm>
-          <a:prstGeom prst="rect">
-            <a:avLst/>
-          </a:prstGeom>
-          <a:noFill/>
-          <a:ln/>
-        </p:spPr>
-        <p:txBody>
-          <a:bodyPr wrap="square" lIns="0" tIns="0" rIns="0" bIns="0" rtlCol="0" anchor="ctr">
-            <a:normAutofit/>
-          </a:bodyPr>
-          <a:lstStyle/>
-          <a:p>
-            <a:pPr algn="ctr" indent="0" marL="0">
-              <a:buNone/>
-            </a:pPr>
-            <a:r>
-              <a:rPr lang="en-US" sz="3600" b="1" dirty="0">
-                <a:solidFill>
-                  <a:srgbClr val="990011"/>
-                </a:solidFill>
-                <a:latin typeface="Times New Roman" pitchFamily="34" charset="0"/>
-                <a:ea typeface="Times New Roman" pitchFamily="34" charset="-122"/>
-                <a:cs typeface="Times New Roman" pitchFamily="34" charset="-120"/>
-              </a:rPr>
-              <a:t>References</a:t>
-            </a:r>
-            <a:endParaRPr lang="en-US" sz="3600" dirty="0"/>
-          </a:p>
-        </p:txBody>
-      </p:sp>
-      <p:sp>
-        <p:nvSpPr>
-          <p:cNvPr id="5" name="Text 2"/>
-          <p:cNvSpPr/>
-          <p:nvPr/>
-        </p:nvSpPr>
-        <p:spPr>
-          <a:xfrm>
-            <a:off x="2697480" y="1783080"/>
-            <a:ext cx="9174175" cy="4663440"/>
-          </a:xfrm>
-          <a:prstGeom prst="rect">
-            <a:avLst/>
-          </a:prstGeom>
-          <a:noFill/>
-          <a:ln/>
-        </p:spPr>
-        <p:txBody>
-          <a:bodyPr wrap="square" lIns="0" tIns="0" rIns="0" bIns="0" rtlCol="0" anchor="t"/>
-          <a:lstStyle/>
-          <a:p>
-            <a:pPr algn="l" marL="342900" indent="-342900">
-              <a:spcAft>
-                <a:spcPts val="800"/>
-              </a:spcAft>
-              <a:buSzPct val="100000"/>
-              <a:buChar char="•"/>
-            </a:pPr>
-            <a:r>
-              <a:rPr lang="en-US" sz="1800" dirty="0">
-                <a:solidFill>
-                  <a:srgbClr val="111111"/>
-                </a:solidFill>
-                <a:latin typeface="Calibri" pitchFamily="34" charset="0"/>
-                <a:ea typeface="Calibri" pitchFamily="34" charset="-122"/>
-                <a:cs typeface="Calibri" pitchFamily="34" charset="-120"/>
-              </a:rPr>
-              <a:t>Harmonised Progression Sheet, Economic Geography (5051), Form 2.</a:t>
-            </a:r>
-            <a:endParaRPr lang="en-US" sz="1800" dirty="0"/>
-          </a:p>
-          <a:p>
-            <a:pPr algn="l" marL="342900" indent="-342900">
-              <a:spcAft>
-                <a:spcPts val="800"/>
-              </a:spcAft>
-              <a:buSzPct val="100000"/>
-              <a:buChar char="•"/>
-            </a:pPr>
-            <a:r>
-              <a:rPr lang="en-US" sz="1800" dirty="0">
-                <a:solidFill>
-                  <a:srgbClr val="111111"/>
-                </a:solidFill>
-                <a:latin typeface="Calibri" pitchFamily="34" charset="0"/>
-                <a:ea typeface="Calibri" pitchFamily="34" charset="-122"/>
-                <a:cs typeface="Calibri" pitchFamily="34" charset="-120"/>
-              </a:rPr>
-              <a:t>Photo, Activity 1: “Sandga Market in Douala, Cameroon” by The Advocacy Project, CC BY-NC-SA 2.0, via Flickr (https://www.flickr.com/photos/42487558@N00/3636438732)</a:t>
-            </a:r>
-            <a:endParaRPr lang="en-US" sz="1800" dirty="0"/>
-          </a:p>
-          <a:p>
-            <a:pPr algn="l" marL="342900" indent="-342900">
-              <a:spcAft>
-                <a:spcPts val="800"/>
-              </a:spcAft>
-              <a:buSzPct val="100000"/>
-              <a:buChar char="•"/>
-            </a:pPr>
-            <a:r>
-              <a:rPr lang="en-US" sz="1800" dirty="0">
-                <a:solidFill>
-                  <a:srgbClr val="111111"/>
-                </a:solidFill>
-                <a:latin typeface="Calibri" pitchFamily="34" charset="0"/>
-                <a:ea typeface="Calibri" pitchFamily="34" charset="-122"/>
-                <a:cs typeface="Calibri" pitchFamily="34" charset="-120"/>
-              </a:rPr>
-              <a:t>Photo, Activity 2: “Train de nuit” by Huard, CC BY-NC-ND 2.0, via Flickr (https://www.flickr.com/photos/41569561@N07/5499545979)</a:t>
-            </a:r>
-            <a:endParaRPr lang="en-US" sz="1800" dirty="0"/>
-          </a:p>
-          <a:p>
-            <a:pPr algn="l" marL="342900" indent="-342900">
-              <a:spcAft>
-                <a:spcPts val="800"/>
-              </a:spcAft>
-              <a:buSzPct val="100000"/>
-              <a:buChar char="•"/>
-            </a:pPr>
-            <a:r>
-              <a:rPr lang="en-US" sz="1800" dirty="0">
-                <a:solidFill>
-                  <a:srgbClr val="111111"/>
-                </a:solidFill>
-                <a:latin typeface="Calibri" pitchFamily="34" charset="0"/>
-                <a:ea typeface="Calibri" pitchFamily="34" charset="-122"/>
-                <a:cs typeface="Calibri" pitchFamily="34" charset="-120"/>
-              </a:rPr>
-              <a:t>Photo, Activity 3: “Scenes from Rwanda” by International Monetary Fund, CC BY-NC-ND 2.0, via Flickr (https://www.flickr.com/photos/38851430@N07/52660758172)</a:t>
-            </a:r>
-            <a:endParaRPr lang="en-US" sz="1800" dirty="0"/>
-          </a:p>
-          <a:p>
-            <a:pPr algn="l" marL="342900" indent="-342900">
-              <a:spcAft>
-                <a:spcPts val="800"/>
-              </a:spcAft>
-              <a:buSzPct val="100000"/>
-              <a:buChar char="•"/>
-            </a:pPr>
-            <a:r>
-              <a:rPr lang="en-US" sz="1800" dirty="0">
-                <a:solidFill>
-                  <a:srgbClr val="111111"/>
-                </a:solidFill>
-                <a:latin typeface="Calibri" pitchFamily="34" charset="0"/>
-                <a:ea typeface="Calibri" pitchFamily="34" charset="-122"/>
-                <a:cs typeface="Calibri" pitchFamily="34" charset="-120"/>
-              </a:rPr>
-              <a:t>Photo, Activity 4: “Class” by WABC Certified Business Coach • Counselor, CC BY 2.0, via Flickr (https://www.flickr.com/photos/43919827@N00/3617014360)</a:t>
-            </a:r>
-            <a:endParaRPr lang="en-US" sz="1800" dirty="0"/>
-          </a:p>
-          <a:p>
-            <a:pPr algn="l" marL="342900" indent="-342900">
-              <a:spcAft>
-                <a:spcPts val="800"/>
-              </a:spcAft>
-              <a:buSzPct val="100000"/>
-              <a:buChar char="•"/>
-            </a:pPr>
-            <a:r>
-              <a:rPr lang="en-US" sz="1800" dirty="0">
-                <a:solidFill>
-                  <a:srgbClr val="111111"/>
-                </a:solidFill>
-                <a:latin typeface="Calibri" pitchFamily="34" charset="0"/>
-                <a:ea typeface="Calibri" pitchFamily="34" charset="-122"/>
-                <a:cs typeface="Calibri" pitchFamily="34" charset="-120"/>
-              </a:rPr>
-              <a:t>Photo, Activity 5: “Sri Lankan Leopard” by Shanaka Kalubowila, CC BY-NC-ND 2.0, via Flickr (https://www.flickr.com/photos/50057113@N06/43689916724)</a:t>
-            </a:r>
-            <a:endParaRPr lang="en-US" sz="1800" dirty="0"/>
-          </a:p>
-          <a:p>
-            <a:pPr algn="l" marL="342900" indent="-342900">
-              <a:spcAft>
-                <a:spcPts val="800"/>
-              </a:spcAft>
-              <a:buSzPct val="100000"/>
-              <a:buChar char="•"/>
-            </a:pPr>
-            <a:r>
-              <a:rPr lang="en-US" sz="1800" dirty="0">
-                <a:solidFill>
-                  <a:srgbClr val="111111"/>
-                </a:solidFill>
-                <a:latin typeface="Calibri" pitchFamily="34" charset="0"/>
-                <a:ea typeface="Calibri" pitchFamily="34" charset="-122"/>
-                <a:cs typeface="Calibri" pitchFamily="34" charset="-120"/>
-              </a:rPr>
-              <a:t>Diagrams and animations: drawn for this lesson (Geography Department).</a:t>
-            </a:r>
-            <a:endParaRPr lang="en-US" sz="1800" dirty="0"/>
-          </a:p>
-        </p:txBody>
-      </p:sp>
-      <p:sp>
-        <p:nvSpPr>
-          <p:cNvPr id="25" name="Slide Number Placeholder 0"/>
-          <p:cNvSpPr>
-            <a:spLocks noGrp="1"/>
-          </p:cNvSpPr>
-          <p:nvPr>
-            <p:ph type="sldNum" sz="quarter" idx="4294967295"/>
-          </p:nvPr>
-        </p:nvSpPr>
-        <p:spPr>
-          <a:xfrm>
-            <a:off x="27432" y="91440"/>
-            <a:ext cx="585216" cy="475488"/>
-          </a:xfrm>
-          <a:prstGeom prst="rect">
-            <a:avLst/>
-          </a:prstGeom>
-          <a:extLst>
-            <a:ext uri="{C572A759-6A51-4108-AA02-DFA0A04FC94B}">
-              <ma14:wrappingTextBoxFlag xmlns:ma14="http://schemas.microsoft.com/office/mac/drawingml/2011/main" val="0"/>
-            </a:ext>
-          </a:extLst>
-        </p:spPr>
-        <p:txBody>
-          <a:bodyPr/>
-          <a:lstStyle>
-            <a:lvl1pPr>
-              <a:defRPr sz="2000">
-                <a:solidFill>
-                  <a:srgbClr val="FFFFFF"/>
-                </a:solidFill>
-                <a:latin typeface="Calibri"/>
-                <a:ea typeface="Calibri"/>
-                <a:cs typeface="Calibri"/>
-              </a:defRPr>
-            </a:lvl1pPr>
-          </a:lstStyle>
-          <a:p>
-            <a:pPr algn="ctr"/>
-            <a:fld id="{F7021451-1387-4CA6-816F-3879F97B5CBC}" type="slidenum">
-              <a:rPr b="1" lang="en-US"/>
-              <a:t>48</a:t>
+              <a:t>49</a:t>
             </a:fld>
             <a:endParaRPr lang="en-US"/>
           </a:p>
@@ -19501,6 +19860,352 @@
 </p:sld>
 </file>
 
+<file path=ppt/slides/slide50.xml><?xml version="1.0" encoding="utf-8"?>
+<p:sld xmlns:a="http://schemas.openxmlformats.org/drawingml/2006/main" xmlns:r="http://schemas.openxmlformats.org/officeDocument/2006/relationships" xmlns:p="http://schemas.openxmlformats.org/presentationml/2006/main">
+  <p:cSld name="Slide 50">
+    <p:spTree>
+      <p:nvGrpSpPr>
+        <p:cNvPr id="1" name=""/>
+        <p:cNvGrpSpPr/>
+        <p:nvPr/>
+      </p:nvGrpSpPr>
+      <p:grpSpPr>
+        <a:xfrm>
+          <a:off x="0" y="0"/>
+          <a:ext cx="0" cy="0"/>
+          <a:chOff x="0" y="0"/>
+          <a:chExt cx="0" cy="0"/>
+        </a:xfrm>
+      </p:grpSpPr>
+      <p:sp>
+        <p:nvSpPr>
+          <p:cNvPr id="2" name="Text 0"/>
+          <p:cNvSpPr/>
+          <p:nvPr/>
+        </p:nvSpPr>
+        <p:spPr>
+          <a:xfrm>
+            <a:off x="457200" y="713232"/>
+            <a:ext cx="11368735" cy="274320"/>
+          </a:xfrm>
+          <a:prstGeom prst="rect">
+            <a:avLst/>
+          </a:prstGeom>
+          <a:noFill/>
+          <a:ln/>
+        </p:spPr>
+        <p:txBody>
+          <a:bodyPr wrap="square" lIns="0" tIns="0" rIns="0" bIns="0" rtlCol="0" anchor="ctr"/>
+          <a:lstStyle/>
+          <a:p>
+            <a:pPr algn="r" indent="0" marL="0">
+              <a:buNone/>
+            </a:pPr>
+            <a:r>
+              <a:rPr lang="en-US" sz="1400" b="1" dirty="0">
+                <a:solidFill>
+                  <a:srgbClr val="1C3F6E"/>
+                </a:solidFill>
+                <a:latin typeface="Calibri" pitchFamily="34" charset="0"/>
+                <a:ea typeface="Calibri" pitchFamily="34" charset="-122"/>
+                <a:cs typeface="Calibri" pitchFamily="34" charset="-120"/>
+              </a:rPr>
+              <a:t>REFERENCES</a:t>
+            </a:r>
+            <a:endParaRPr lang="en-US" sz="1400" dirty="0"/>
+          </a:p>
+        </p:txBody>
+      </p:sp>
+      <p:pic>
+        <p:nvPicPr>
+          <p:cNvPr id="3" name="Image 0" descr="/home/claude/f4/img/minesec_sheet.png">    </p:cNvPr>
+          <p:cNvPicPr>
+            <a:picLocks noChangeAspect="1"/>
+          </p:cNvPicPr>
+          <p:nvPr/>
+        </p:nvPicPr>
+        <p:blipFill>
+          <a:blip r:embed="rId1"/>
+          <a:stretch>
+            <a:fillRect/>
+          </a:stretch>
+        </p:blipFill>
+        <p:spPr>
+          <a:xfrm>
+            <a:off x="0" y="658368"/>
+            <a:ext cx="2468880" cy="5833872"/>
+          </a:xfrm>
+          <a:prstGeom prst="rect">
+            <a:avLst/>
+          </a:prstGeom>
+        </p:spPr>
+      </p:pic>
+      <p:sp>
+        <p:nvSpPr>
+          <p:cNvPr id="4" name="Text 1"/>
+          <p:cNvSpPr/>
+          <p:nvPr/>
+        </p:nvSpPr>
+        <p:spPr>
+          <a:xfrm>
+            <a:off x="2697480" y="1005840"/>
+            <a:ext cx="9174175" cy="731520"/>
+          </a:xfrm>
+          <a:prstGeom prst="rect">
+            <a:avLst/>
+          </a:prstGeom>
+          <a:noFill/>
+          <a:ln/>
+        </p:spPr>
+        <p:txBody>
+          <a:bodyPr wrap="square" lIns="0" tIns="0" rIns="0" bIns="0" rtlCol="0" anchor="ctr">
+            <a:normAutofit/>
+          </a:bodyPr>
+          <a:lstStyle/>
+          <a:p>
+            <a:pPr algn="ctr" indent="0" marL="0">
+              <a:buNone/>
+            </a:pPr>
+            <a:r>
+              <a:rPr lang="en-US" sz="3600" b="1" dirty="0">
+                <a:solidFill>
+                  <a:srgbClr val="990011"/>
+                </a:solidFill>
+                <a:latin typeface="Times New Roman" pitchFamily="34" charset="0"/>
+                <a:ea typeface="Times New Roman" pitchFamily="34" charset="-122"/>
+                <a:cs typeface="Times New Roman" pitchFamily="34" charset="-120"/>
+              </a:rPr>
+              <a:t>References</a:t>
+            </a:r>
+            <a:endParaRPr lang="en-US" sz="3600" dirty="0"/>
+          </a:p>
+        </p:txBody>
+      </p:sp>
+      <p:sp>
+        <p:nvSpPr>
+          <p:cNvPr id="5" name="Text 2"/>
+          <p:cNvSpPr/>
+          <p:nvPr/>
+        </p:nvSpPr>
+        <p:spPr>
+          <a:xfrm>
+            <a:off x="2697480" y="1783080"/>
+            <a:ext cx="9174175" cy="4663440"/>
+          </a:xfrm>
+          <a:prstGeom prst="rect">
+            <a:avLst/>
+          </a:prstGeom>
+          <a:noFill/>
+          <a:ln/>
+        </p:spPr>
+        <p:txBody>
+          <a:bodyPr wrap="square" lIns="0" tIns="0" rIns="0" bIns="0" rtlCol="0" anchor="t"/>
+          <a:lstStyle/>
+          <a:p>
+            <a:pPr algn="l" marL="342900" indent="-342900">
+              <a:spcAft>
+                <a:spcPts val="800"/>
+              </a:spcAft>
+              <a:buSzPct val="100000"/>
+              <a:buChar char="•"/>
+            </a:pPr>
+            <a:r>
+              <a:rPr lang="en-US" sz="1800" dirty="0">
+                <a:solidFill>
+                  <a:srgbClr val="111111"/>
+                </a:solidFill>
+                <a:latin typeface="Calibri" pitchFamily="34" charset="0"/>
+                <a:ea typeface="Calibri" pitchFamily="34" charset="-122"/>
+                <a:cs typeface="Calibri" pitchFamily="34" charset="-120"/>
+              </a:rPr>
+              <a:t>Harmonised Progression Sheet, Economic Geography (5051), Form 2.</a:t>
+            </a:r>
+            <a:endParaRPr lang="en-US" sz="1800" dirty="0"/>
+          </a:p>
+          <a:p>
+            <a:pPr algn="l" marL="342900" indent="-342900">
+              <a:spcAft>
+                <a:spcPts val="800"/>
+              </a:spcAft>
+              <a:buSzPct val="100000"/>
+              <a:buChar char="•"/>
+            </a:pPr>
+            <a:r>
+              <a:rPr lang="en-US" sz="1800" dirty="0">
+                <a:solidFill>
+                  <a:srgbClr val="111111"/>
+                </a:solidFill>
+                <a:latin typeface="Calibri" pitchFamily="34" charset="0"/>
+                <a:ea typeface="Calibri" pitchFamily="34" charset="-122"/>
+                <a:cs typeface="Calibri" pitchFamily="34" charset="-120"/>
+              </a:rPr>
+              <a:t>Photo, Activity 1: “Sandga Market in Douala, Cameroon” by The Advocacy Project, CC BY-NC-SA 2.0, via Flickr (https://www.flickr.com/photos/42487558@N00/3636438732)</a:t>
+            </a:r>
+            <a:endParaRPr lang="en-US" sz="1800" dirty="0"/>
+          </a:p>
+          <a:p>
+            <a:pPr algn="l" marL="342900" indent="-342900">
+              <a:spcAft>
+                <a:spcPts val="800"/>
+              </a:spcAft>
+              <a:buSzPct val="100000"/>
+              <a:buChar char="•"/>
+            </a:pPr>
+            <a:r>
+              <a:rPr lang="en-US" sz="1800" dirty="0">
+                <a:solidFill>
+                  <a:srgbClr val="111111"/>
+                </a:solidFill>
+                <a:latin typeface="Calibri" pitchFamily="34" charset="0"/>
+                <a:ea typeface="Calibri" pitchFamily="34" charset="-122"/>
+                <a:cs typeface="Calibri" pitchFamily="34" charset="-120"/>
+              </a:rPr>
+              <a:t>Photo, Activity 2: “Train de nuit” by Huard, CC BY-NC-ND 2.0, via Flickr (https://www.flickr.com/photos/41569561@N07/5499545979)</a:t>
+            </a:r>
+            <a:endParaRPr lang="en-US" sz="1800" dirty="0"/>
+          </a:p>
+          <a:p>
+            <a:pPr algn="l" marL="342900" indent="-342900">
+              <a:spcAft>
+                <a:spcPts val="800"/>
+              </a:spcAft>
+              <a:buSzPct val="100000"/>
+              <a:buChar char="•"/>
+            </a:pPr>
+            <a:r>
+              <a:rPr lang="en-US" sz="1800" dirty="0">
+                <a:solidFill>
+                  <a:srgbClr val="111111"/>
+                </a:solidFill>
+                <a:latin typeface="Calibri" pitchFamily="34" charset="0"/>
+                <a:ea typeface="Calibri" pitchFamily="34" charset="-122"/>
+                <a:cs typeface="Calibri" pitchFamily="34" charset="-120"/>
+              </a:rPr>
+              <a:t>Photo, Activity 3: “Scenes from Rwanda” by International Monetary Fund, CC BY-NC-ND 2.0, via Flickr (https://www.flickr.com/photos/38851430@N07/52660758172)</a:t>
+            </a:r>
+            <a:endParaRPr lang="en-US" sz="1800" dirty="0"/>
+          </a:p>
+          <a:p>
+            <a:pPr algn="l" marL="342900" indent="-342900">
+              <a:spcAft>
+                <a:spcPts val="800"/>
+              </a:spcAft>
+              <a:buSzPct val="100000"/>
+              <a:buChar char="•"/>
+            </a:pPr>
+            <a:r>
+              <a:rPr lang="en-US" sz="1800" dirty="0">
+                <a:solidFill>
+                  <a:srgbClr val="111111"/>
+                </a:solidFill>
+                <a:latin typeface="Calibri" pitchFamily="34" charset="0"/>
+                <a:ea typeface="Calibri" pitchFamily="34" charset="-122"/>
+                <a:cs typeface="Calibri" pitchFamily="34" charset="-120"/>
+              </a:rPr>
+              <a:t>Photo, Activity 4: “Class” by WABC Certified Business Coach • Counselor, CC BY 2.0, via Flickr (https://www.flickr.com/photos/43919827@N00/3617014360)</a:t>
+            </a:r>
+            <a:endParaRPr lang="en-US" sz="1800" dirty="0"/>
+          </a:p>
+          <a:p>
+            <a:pPr algn="l" marL="342900" indent="-342900">
+              <a:spcAft>
+                <a:spcPts val="800"/>
+              </a:spcAft>
+              <a:buSzPct val="100000"/>
+              <a:buChar char="•"/>
+            </a:pPr>
+            <a:r>
+              <a:rPr lang="en-US" sz="1800" dirty="0">
+                <a:solidFill>
+                  <a:srgbClr val="111111"/>
+                </a:solidFill>
+                <a:latin typeface="Calibri" pitchFamily="34" charset="0"/>
+                <a:ea typeface="Calibri" pitchFamily="34" charset="-122"/>
+                <a:cs typeface="Calibri" pitchFamily="34" charset="-120"/>
+              </a:rPr>
+              <a:t>Photo, Activity 5: “Sri Lankan Leopard” by Shanaka Kalubowila, CC BY-NC-ND 2.0, via Flickr (https://www.flickr.com/photos/50057113@N06/43689916724)</a:t>
+            </a:r>
+            <a:endParaRPr lang="en-US" sz="1800" dirty="0"/>
+          </a:p>
+          <a:p>
+            <a:pPr algn="l" marL="342900" indent="-342900">
+              <a:spcAft>
+                <a:spcPts val="800"/>
+              </a:spcAft>
+              <a:buSzPct val="100000"/>
+              <a:buChar char="•"/>
+            </a:pPr>
+            <a:r>
+              <a:rPr lang="en-US" sz="1800" dirty="0">
+                <a:solidFill>
+                  <a:srgbClr val="111111"/>
+                </a:solidFill>
+                <a:latin typeface="Calibri" pitchFamily="34" charset="0"/>
+                <a:ea typeface="Calibri" pitchFamily="34" charset="-122"/>
+                <a:cs typeface="Calibri" pitchFamily="34" charset="-120"/>
+              </a:rPr>
+              <a:t>Diagrams and animations: drawn for this lesson (Geography Department).</a:t>
+            </a:r>
+            <a:endParaRPr lang="en-US" sz="1800" dirty="0"/>
+          </a:p>
+        </p:txBody>
+      </p:sp>
+      <p:sp>
+        <p:nvSpPr>
+          <p:cNvPr id="25" name="Slide Number Placeholder 0"/>
+          <p:cNvSpPr>
+            <a:spLocks noGrp="1"/>
+          </p:cNvSpPr>
+          <p:nvPr>
+            <p:ph type="sldNum" sz="quarter" idx="4294967295"/>
+          </p:nvPr>
+        </p:nvSpPr>
+        <p:spPr>
+          <a:xfrm>
+            <a:off x="27432" y="91440"/>
+            <a:ext cx="585216" cy="475488"/>
+          </a:xfrm>
+          <a:prstGeom prst="rect">
+            <a:avLst/>
+          </a:prstGeom>
+          <a:extLst>
+            <a:ext uri="{C572A759-6A51-4108-AA02-DFA0A04FC94B}">
+              <ma14:wrappingTextBoxFlag xmlns:ma14="http://schemas.microsoft.com/office/mac/drawingml/2011/main" val="0"/>
+            </a:ext>
+          </a:extLst>
+        </p:spPr>
+        <p:txBody>
+          <a:bodyPr/>
+          <a:lstStyle>
+            <a:lvl1pPr>
+              <a:defRPr sz="2000">
+                <a:solidFill>
+                  <a:srgbClr val="FFFFFF"/>
+                </a:solidFill>
+                <a:latin typeface="Calibri"/>
+                <a:ea typeface="Calibri"/>
+                <a:cs typeface="Calibri"/>
+              </a:defRPr>
+            </a:lvl1pPr>
+          </a:lstStyle>
+          <a:p>
+            <a:pPr algn="ctr"/>
+            <a:fld id="{F7021451-1387-4CA6-816F-3879F97B5CBC}" type="slidenum">
+              <a:rPr b="1" lang="en-US"/>
+              <a:t>50</a:t>
+            </a:fld>
+            <a:endParaRPr lang="en-US"/>
+          </a:p>
+        </p:txBody>
+      </p:sp>
+    </p:spTree>
+  </p:cSld>
+  <p:clrMapOvr>
+    <a:masterClrMapping/>
+  </p:clrMapOvr>
+</p:sld>
+</file>
+
 <file path=ppt/slides/slide6.xml><?xml version="1.0" encoding="utf-8"?>
 <p:sld xmlns:a="http://schemas.openxmlformats.org/drawingml/2006/main" xmlns:r="http://schemas.openxmlformats.org/officeDocument/2006/relationships" xmlns:p="http://schemas.openxmlformats.org/presentationml/2006/main">
   <p:cSld name="Slide 6">
@@ -20431,7 +21136,7 @@
         <p:spPr>
           <a:xfrm>
             <a:off x="0" y="658368"/>
-            <a:ext cx="5120640" cy="5833872"/>
+            <a:ext cx="2468880" cy="5833872"/>
           </a:xfrm>
           <a:prstGeom prst="rect">
             <a:avLst/>
@@ -20446,8 +21151,8 @@
         </p:nvSpPr>
         <p:spPr>
           <a:xfrm>
-            <a:off x="5349240" y="1005840"/>
-            <a:ext cx="6522415" cy="731520"/>
+            <a:off x="2697480" y="1005840"/>
+            <a:ext cx="9174175" cy="731520"/>
           </a:xfrm>
           <a:prstGeom prst="rect">
             <a:avLst/>
@@ -20487,8 +21192,8 @@
         </p:nvSpPr>
         <p:spPr>
           <a:xfrm>
-            <a:off x="5349240" y="1783080"/>
-            <a:ext cx="6522415" cy="4663440"/>
+            <a:off x="2697480" y="1783080"/>
+            <a:ext cx="9174175" cy="4663440"/>
           </a:xfrm>
           <a:prstGeom prst="rect">
             <a:avLst/>
@@ -20515,7 +21220,7 @@
                 <a:ea typeface="Times New Roman" pitchFamily="34" charset="-122"/>
                 <a:cs typeface="Times New Roman" pitchFamily="34" charset="-120"/>
               </a:rPr>
-              <a:t>The CICAM factory in Garoua has made a lot of cloth. But the road to Ngaoundéré is damaged, and lorries cannot pass. The cloth stays in the factory, and traders in the South have nothing to sell.</a:t>
+              <a:t>The CICAM factory in Garoua has made a lot of cloth, but the road to Ngaoundéré is damaged and lorries cannot pass. The cloth stays in the factory, and traders in the South have nothing to sell. The manager asks: "Which activities help goods reach the people?"</a:t>
             </a:r>
             <a:endParaRPr lang="en-US" sz="4000" dirty="0"/>
           </a:p>

--- a/lecons/F2T/24_S18_L5_P5_Tertiary_Sector.pptx
+++ b/lecons/F2T/24_S18_L5_P5_Tertiary_Sector.pptx
@@ -3455,7 +3455,7 @@
           <a:p>
             <a:r>
               <a:rPr lang="en-US" dirty="0"/>
-              <a:t>Before we start the new lesson, let us correct the homework I gave you at the end of Lesson 5 (Part 4): The Sectors of the Economy: The Secondary Sector (Definition and Examples). The question was: List four services that your family uses every week, for example transport, school, hospital, market or mobile money. Take out your exercise books.</a:t>
+              <a:t>Before we start the new lesson, let us correct the homework I gave you at the end of Lesson 5 (Part 4): The Sectors of the Economy: The Secondary Sector (Definition and Examples). The question was: Give three services used every day. Take out your exercise books.</a:t>
             </a:r>
             <a:endParaRPr lang="en-US" dirty="0"/>
           </a:p>
@@ -3895,7 +3895,7 @@
           <a:p>
             <a:r>
               <a:rPr lang="en-US" dirty="0"/>
-              <a:t>For your homework: Find out what a research centre does. Ask an adult or read about IRAD (Institute of Agricultural Research for Development). We shall correct it at the beginning of our next lesson.</a:t>
+              <a:t>For your homework: Name one research centre in Cameroon. We shall correct it at the beginning of our next lesson.</a:t>
             </a:r>
             <a:endParaRPr lang="en-US" dirty="0"/>
           </a:p>
@@ -4423,7 +4423,7 @@
           <a:p>
             <a:r>
               <a:rPr lang="en-US" dirty="0"/>
-              <a:t>Here is a good answer. Examples: transport (moto-taxi, bus); school; hospital or health centre; market; mobile money (MTN, Orange). Compare it with your own answer and correct your work in red.</a:t>
+              <a:t>Here is a good answer. Transport, trade and health (also education and mobile money). Compare it with your own answer and correct your work in red.</a:t>
             </a:r>
             <a:endParaRPr lang="en-US" dirty="0"/>
           </a:p>
@@ -14723,7 +14723,7 @@
         <p:spPr>
           <a:xfrm>
             <a:off x="0" y="658368"/>
-            <a:ext cx="2468880" cy="5833872"/>
+            <a:ext cx="5120640" cy="5833872"/>
           </a:xfrm>
           <a:prstGeom prst="rect">
             <a:avLst/>
@@ -14738,8 +14738,8 @@
         </p:nvSpPr>
         <p:spPr>
           <a:xfrm>
-            <a:off x="2697480" y="1005840"/>
-            <a:ext cx="9174175" cy="731520"/>
+            <a:off x="5349240" y="1005840"/>
+            <a:ext cx="6522415" cy="731520"/>
           </a:xfrm>
           <a:prstGeom prst="rect">
             <a:avLst/>
@@ -14779,8 +14779,8 @@
         </p:nvSpPr>
         <p:spPr>
           <a:xfrm>
-            <a:off x="2697480" y="1783080"/>
-            <a:ext cx="9174175" cy="4663440"/>
+            <a:off x="5349240" y="1783080"/>
+            <a:ext cx="6522415" cy="4663440"/>
           </a:xfrm>
           <a:prstGeom prst="rect">
             <a:avLst/>
@@ -14827,7 +14827,7 @@
                 <a:ea typeface="Times New Roman" pitchFamily="34" charset="-122"/>
                 <a:cs typeface="Times New Roman" pitchFamily="34" charset="-120"/>
               </a:rPr>
-              <a:t>List four services that your family uses every week, for example transport, school, hospital, market or mobile money.</a:t>
+              <a:t>Give three services used every day.</a:t>
             </a:r>
             <a:endParaRPr lang="en-US" sz="4000" dirty="0"/>
           </a:p>
@@ -15988,7 +15988,7 @@
                 <a:ea typeface="Times New Roman" pitchFamily="34" charset="-122"/>
                 <a:cs typeface="Times New Roman" pitchFamily="34" charset="-120"/>
               </a:rPr>
-              <a:t>Find out what a research centre does. Ask an adult or read about IRAD (Institute of Agricultural Research for Development).</a:t>
+              <a:t>Name one research centre in Cameroon.</a:t>
             </a:r>
             <a:endParaRPr lang="en-US" sz="4000" dirty="0"/>
           </a:p>
@@ -18928,7 +18928,7 @@
                           <a:ea typeface="Calibri" pitchFamily="34" charset="-122"/>
                           <a:cs typeface="Calibri" pitchFamily="34" charset="-120"/>
                         </a:rPr>
-                        <a:t>Find out what a research centre does. Ask an adult or read about IRAD (Institute of Agricultural Research for Development).</a:t>
+                        <a:t>Name one research centre in Cameroon.</a:t>
                       </a:r>
                       <a:endParaRPr lang="en-US" sz="1600" dirty="0">
                         <a:latin typeface="Calibri" charset="0"/>
@@ -19798,7 +19798,7 @@
                 <a:ea typeface="Times New Roman" pitchFamily="34" charset="-122"/>
                 <a:cs typeface="Times New Roman" pitchFamily="34" charset="-120"/>
               </a:rPr>
-              <a:t>Examples: transport (moto-taxi, bus); school; hospital or health centre; market; mobile money (MTN, Orange).</a:t>
+              <a:t>Transport, trade and health (also education and mobile money).</a:t>
             </a:r>
             <a:endParaRPr lang="en-US" sz="4000" dirty="0"/>
           </a:p>
